--- a/courses/nus1/files/slides/template.pptx
+++ b/courses/nus1/files/slides/template.pptx
@@ -997,7 +997,7 @@
           <a:p>
             <a:fld id="{5BCAD085-E8A6-8845-BD4E-CB4CCA059FC4}" type="datetimeFigureOut">
               <a:rPr lang="en-US" smtClean="0"/>
-              <a:t>9/10/2026</a:t>
+              <a:t>9/14/2026</a:t>
             </a:fld>
             <a:endParaRPr lang="en-US"/>
           </a:p>
@@ -1165,7 +1165,7 @@
           <a:p>
             <a:fld id="{5BCAD085-E8A6-8845-BD4E-CB4CCA059FC4}" type="datetimeFigureOut">
               <a:rPr lang="en-US" smtClean="0"/>
-              <a:t>9/10/2026</a:t>
+              <a:t>9/14/2026</a:t>
             </a:fld>
             <a:endParaRPr lang="en-US"/>
           </a:p>
@@ -1343,7 +1343,7 @@
           <a:p>
             <a:fld id="{5BCAD085-E8A6-8845-BD4E-CB4CCA059FC4}" type="datetimeFigureOut">
               <a:rPr lang="en-US" smtClean="0"/>
-              <a:t>9/10/2026</a:t>
+              <a:t>9/14/2026</a:t>
             </a:fld>
             <a:endParaRPr lang="en-US"/>
           </a:p>
@@ -1511,7 +1511,7 @@
           <a:p>
             <a:fld id="{5BCAD085-E8A6-8845-BD4E-CB4CCA059FC4}" type="datetimeFigureOut">
               <a:rPr lang="en-US" smtClean="0"/>
-              <a:t>9/10/2026</a:t>
+              <a:t>9/14/2026</a:t>
             </a:fld>
             <a:endParaRPr lang="en-US"/>
           </a:p>
@@ -1756,7 +1756,7 @@
           <a:p>
             <a:fld id="{5BCAD085-E8A6-8845-BD4E-CB4CCA059FC4}" type="datetimeFigureOut">
               <a:rPr lang="en-US" smtClean="0"/>
-              <a:t>9/10/2026</a:t>
+              <a:t>9/14/2026</a:t>
             </a:fld>
             <a:endParaRPr lang="en-US"/>
           </a:p>
@@ -2041,7 +2041,7 @@
           <a:p>
             <a:fld id="{5BCAD085-E8A6-8845-BD4E-CB4CCA059FC4}" type="datetimeFigureOut">
               <a:rPr lang="en-US" smtClean="0"/>
-              <a:t>9/10/2026</a:t>
+              <a:t>9/14/2026</a:t>
             </a:fld>
             <a:endParaRPr lang="en-US"/>
           </a:p>
@@ -2460,7 +2460,7 @@
           <a:p>
             <a:fld id="{5BCAD085-E8A6-8845-BD4E-CB4CCA059FC4}" type="datetimeFigureOut">
               <a:rPr lang="en-US" smtClean="0"/>
-              <a:t>9/10/2026</a:t>
+              <a:t>9/14/2026</a:t>
             </a:fld>
             <a:endParaRPr lang="en-US"/>
           </a:p>
@@ -2577,7 +2577,7 @@
           <a:p>
             <a:fld id="{5BCAD085-E8A6-8845-BD4E-CB4CCA059FC4}" type="datetimeFigureOut">
               <a:rPr lang="en-US" smtClean="0"/>
-              <a:t>9/10/2026</a:t>
+              <a:t>9/14/2026</a:t>
             </a:fld>
             <a:endParaRPr lang="en-US"/>
           </a:p>
@@ -2672,7 +2672,7 @@
           <a:p>
             <a:fld id="{5BCAD085-E8A6-8845-BD4E-CB4CCA059FC4}" type="datetimeFigureOut">
               <a:rPr lang="en-US" smtClean="0"/>
-              <a:t>9/10/2026</a:t>
+              <a:t>9/14/2026</a:t>
             </a:fld>
             <a:endParaRPr lang="en-US"/>
           </a:p>
@@ -2947,7 +2947,7 @@
           <a:p>
             <a:fld id="{5BCAD085-E8A6-8845-BD4E-CB4CCA059FC4}" type="datetimeFigureOut">
               <a:rPr lang="en-US" smtClean="0"/>
-              <a:t>9/10/2026</a:t>
+              <a:t>9/14/2026</a:t>
             </a:fld>
             <a:endParaRPr lang="en-US"/>
           </a:p>
@@ -3199,7 +3199,7 @@
           <a:p>
             <a:fld id="{5BCAD085-E8A6-8845-BD4E-CB4CCA059FC4}" type="datetimeFigureOut">
               <a:rPr lang="en-US" smtClean="0"/>
-              <a:t>9/10/2026</a:t>
+              <a:t>9/14/2026</a:t>
             </a:fld>
             <a:endParaRPr lang="en-US"/>
           </a:p>
@@ -3410,7 +3410,7 @@
           <a:p>
             <a:fld id="{5BCAD085-E8A6-8845-BD4E-CB4CCA059FC4}" type="datetimeFigureOut">
               <a:rPr lang="en-US" smtClean="0"/>
-              <a:t>9/10/2026</a:t>
+              <a:t>9/14/2026</a:t>
             </a:fld>
             <a:endParaRPr lang="en-US"/>
           </a:p>
@@ -4124,47 +4124,12 @@
           </a:p>
         </p:txBody>
       </p:sp>
-      <p:sp>
-        <p:nvSpPr>
-          <p:cNvPr id="9" name="TextBox 8"/>
-          <p:cNvSpPr txBox="1"/>
-          <p:nvPr/>
-        </p:nvSpPr>
-        <p:spPr>
-          <a:xfrm>
-            <a:off x="10881360" y="5989320"/>
-            <a:ext cx="685800" cy="274320"/>
-          </a:xfrm>
-          <a:prstGeom prst="rect">
-            <a:avLst/>
-          </a:prstGeom>
-          <a:noFill/>
-        </p:spPr>
-        <p:txBody>
-          <a:bodyPr wrap="none" lIns="0" tIns="0" rIns="0" bIns="0" anchor="t">
-            <a:spAutoFit/>
-          </a:bodyPr>
-          <a:lstStyle/>
-          <a:p>
-            <a:pPr algn="r"/>
-            <a:r>
-              <a:rPr sz="1000" b="1">
-                <a:solidFill>
-                  <a:srgbClr val="737373"/>
-                </a:solidFill>
-                <a:latin typeface="Aptos"/>
-              </a:rPr>
-              <a:t>NUS1</a:t>
-            </a:r>
-          </a:p>
-        </p:txBody>
-      </p:sp>
       <p:pic>
         <p:nvPicPr>
-          <p:cNvPr id="11" name="Grafik 10">
+          <p:cNvPr id="12" name="Grafik 11">
             <a:extLst>
               <a:ext uri="{FF2B5EF4-FFF2-40B4-BE49-F238E27FC236}">
-                <a16:creationId xmlns:a16="http://schemas.microsoft.com/office/drawing/2014/main" id="{0D1A7063-BF8F-D128-C379-07FCFED4AC6E}"/>
+                <a16:creationId xmlns:a16="http://schemas.microsoft.com/office/drawing/2014/main" id="{FC2376DB-FD73-E522-DD12-8C3D47FFD695}"/>
               </a:ext>
             </a:extLst>
           </p:cNvPr>
@@ -4181,8 +4146,8 @@
         </p:blipFill>
         <p:spPr>
           <a:xfrm>
-            <a:off x="8430768" y="271310"/>
-            <a:ext cx="3136392" cy="3136392"/>
+            <a:off x="9113435" y="236574"/>
+            <a:ext cx="2689505" cy="2689505"/>
           </a:xfrm>
           <a:prstGeom prst="rect">
             <a:avLst/>
@@ -4191,10 +4156,10 @@
       </p:pic>
       <p:sp>
         <p:nvSpPr>
-          <p:cNvPr id="13" name="TextBox 7">
+          <p:cNvPr id="15" name="TextBox 7">
             <a:extLst>
               <a:ext uri="{FF2B5EF4-FFF2-40B4-BE49-F238E27FC236}">
-                <a16:creationId xmlns:a16="http://schemas.microsoft.com/office/drawing/2014/main" id="{F78FDD6A-A394-1FCD-8583-FB60743A0344}"/>
+                <a16:creationId xmlns:a16="http://schemas.microsoft.com/office/drawing/2014/main" id="{568BB238-676F-2AD1-5311-843CEFE0748F}"/>
               </a:ext>
             </a:extLst>
           </p:cNvPr>
@@ -4203,7 +4168,7 @@
         </p:nvSpPr>
         <p:spPr>
           <a:xfrm>
-            <a:off x="9712026" y="3447138"/>
+            <a:off x="10171249" y="2926079"/>
             <a:ext cx="573875" cy="169277"/>
           </a:xfrm>
           <a:prstGeom prst="rect">
@@ -4225,6 +4190,82 @@
                 <a:latin typeface="Aptos"/>
               </a:rPr>
               <a:t>Webseite</a:t>
+            </a:r>
+            <a:endParaRPr sz="1100" b="0" dirty="0">
+              <a:solidFill>
+                <a:srgbClr val="737373"/>
+              </a:solidFill>
+              <a:latin typeface="Aptos"/>
+            </a:endParaRPr>
+          </a:p>
+        </p:txBody>
+      </p:sp>
+      <p:pic>
+        <p:nvPicPr>
+          <p:cNvPr id="17" name="Grafik 16">
+            <a:extLst>
+              <a:ext uri="{FF2B5EF4-FFF2-40B4-BE49-F238E27FC236}">
+                <a16:creationId xmlns:a16="http://schemas.microsoft.com/office/drawing/2014/main" id="{A10E91CE-7B15-F9A8-AE20-F447081B8588}"/>
+              </a:ext>
+            </a:extLst>
+          </p:cNvPr>
+          <p:cNvPicPr>
+            <a:picLocks noChangeAspect="1"/>
+          </p:cNvPicPr>
+          <p:nvPr/>
+        </p:nvPicPr>
+        <p:blipFill>
+          <a:blip r:embed="rId4"/>
+          <a:stretch>
+            <a:fillRect/>
+          </a:stretch>
+        </p:blipFill>
+        <p:spPr>
+          <a:xfrm>
+            <a:off x="9113435" y="3246120"/>
+            <a:ext cx="2689505" cy="2689505"/>
+          </a:xfrm>
+          <a:prstGeom prst="rect">
+            <a:avLst/>
+          </a:prstGeom>
+        </p:spPr>
+      </p:pic>
+      <p:sp>
+        <p:nvSpPr>
+          <p:cNvPr id="19" name="TextBox 7">
+            <a:extLst>
+              <a:ext uri="{FF2B5EF4-FFF2-40B4-BE49-F238E27FC236}">
+                <a16:creationId xmlns:a16="http://schemas.microsoft.com/office/drawing/2014/main" id="{D71EEF3B-ED6D-524B-767C-8CC0B281E789}"/>
+              </a:ext>
+            </a:extLst>
+          </p:cNvPr>
+          <p:cNvSpPr txBox="1"/>
+          <p:nvPr/>
+        </p:nvSpPr>
+        <p:spPr>
+          <a:xfrm>
+            <a:off x="10249795" y="5850986"/>
+            <a:ext cx="416781" cy="169277"/>
+          </a:xfrm>
+          <a:prstGeom prst="rect">
+            <a:avLst/>
+          </a:prstGeom>
+          <a:noFill/>
+        </p:spPr>
+        <p:txBody>
+          <a:bodyPr wrap="none" lIns="0" tIns="0" rIns="0" bIns="0" anchor="t">
+            <a:spAutoFit/>
+          </a:bodyPr>
+          <a:lstStyle/>
+          <a:p>
+            <a:r>
+              <a:rPr lang="de-CH" sz="1100" dirty="0">
+                <a:solidFill>
+                  <a:srgbClr val="737373"/>
+                </a:solidFill>
+                <a:latin typeface="Aptos"/>
+              </a:rPr>
+              <a:t>Fragen</a:t>
             </a:r>
             <a:endParaRPr sz="1100" b="0" dirty="0">
               <a:solidFill>
@@ -4497,8 +4538,8 @@
         </p:nvSpPr>
         <p:spPr>
           <a:xfrm>
-            <a:off x="8595360" y="6492240"/>
-            <a:ext cx="2057400" cy="201168"/>
+            <a:off x="10074076" y="6492240"/>
+            <a:ext cx="578684" cy="130805"/>
           </a:xfrm>
           <a:prstGeom prst="rect">
             <a:avLst/>
@@ -4513,14 +4554,20 @@
           <a:p>
             <a:pPr algn="r"/>
             <a:r>
-              <a:rPr sz="850" b="0">
+              <a:rPr sz="850" b="0" dirty="0">
                 <a:solidFill>
                   <a:srgbClr val="737373"/>
                 </a:solidFill>
                 <a:latin typeface="Aptos"/>
               </a:rPr>
-              <a:t>Enrico Putzi · TA</a:t>
-            </a:r>
+              <a:t>Enrico Putzi </a:t>
+            </a:r>
+            <a:endParaRPr lang="de-CH" sz="850" dirty="0">
+              <a:solidFill>
+                <a:srgbClr val="737373"/>
+              </a:solidFill>
+              <a:latin typeface="Aptos"/>
+            </a:endParaRPr>
           </a:p>
         </p:txBody>
       </p:sp>
@@ -4998,8 +5045,8 @@
         </p:nvSpPr>
         <p:spPr>
           <a:xfrm>
-            <a:off x="8595360" y="6492240"/>
-            <a:ext cx="2057400" cy="201168"/>
+            <a:off x="10096518" y="6492240"/>
+            <a:ext cx="556242" cy="130805"/>
           </a:xfrm>
           <a:prstGeom prst="rect">
             <a:avLst/>
@@ -5014,14 +5061,20 @@
           <a:p>
             <a:pPr algn="r"/>
             <a:r>
-              <a:rPr sz="850" b="0">
+              <a:rPr sz="850" b="0" dirty="0">
                 <a:solidFill>
                   <a:srgbClr val="737373"/>
                 </a:solidFill>
                 <a:latin typeface="Aptos"/>
               </a:rPr>
-              <a:t>Enrico Putzi · TA</a:t>
-            </a:r>
+              <a:t>Enrico Putzi</a:t>
+            </a:r>
+            <a:endParaRPr lang="de-CH" sz="850" b="0" dirty="0">
+              <a:solidFill>
+                <a:srgbClr val="737373"/>
+              </a:solidFill>
+              <a:latin typeface="Aptos"/>
+            </a:endParaRPr>
           </a:p>
         </p:txBody>
       </p:sp>
@@ -5393,8 +5446,8 @@
         </p:nvSpPr>
         <p:spPr>
           <a:xfrm>
-            <a:off x="8595360" y="6492240"/>
-            <a:ext cx="2057400" cy="201168"/>
+            <a:off x="10096518" y="6492240"/>
+            <a:ext cx="556242" cy="130805"/>
           </a:xfrm>
           <a:prstGeom prst="rect">
             <a:avLst/>
@@ -5409,13 +5462,13 @@
           <a:p>
             <a:pPr algn="r"/>
             <a:r>
-              <a:rPr sz="850" b="0">
+              <a:rPr sz="850" b="0" dirty="0">
                 <a:solidFill>
                   <a:srgbClr val="737373"/>
                 </a:solidFill>
                 <a:latin typeface="Aptos"/>
               </a:rPr>
-              <a:t>Enrico Putzi · TA</a:t>
+              <a:t>Enrico Putzi</a:t>
             </a:r>
           </a:p>
         </p:txBody>
@@ -5787,8 +5840,8 @@
         </p:nvSpPr>
         <p:spPr>
           <a:xfrm>
-            <a:off x="8595360" y="6492240"/>
-            <a:ext cx="2057400" cy="201168"/>
+            <a:off x="10096518" y="6492240"/>
+            <a:ext cx="556242" cy="130805"/>
           </a:xfrm>
           <a:prstGeom prst="rect">
             <a:avLst/>
@@ -5803,13 +5856,13 @@
           <a:p>
             <a:pPr algn="r"/>
             <a:r>
-              <a:rPr sz="850" b="0">
+              <a:rPr sz="850" b="0" dirty="0">
                 <a:solidFill>
                   <a:srgbClr val="737373"/>
                 </a:solidFill>
                 <a:latin typeface="Aptos"/>
               </a:rPr>
-              <a:t>Enrico Putzi · TA</a:t>
+              <a:t>Enrico Putzi</a:t>
             </a:r>
           </a:p>
         </p:txBody>
@@ -6567,8 +6620,8 @@
         </p:nvSpPr>
         <p:spPr>
           <a:xfrm>
-            <a:off x="8595360" y="6492240"/>
-            <a:ext cx="2057400" cy="201168"/>
+            <a:off x="10074076" y="6492240"/>
+            <a:ext cx="578684" cy="130805"/>
           </a:xfrm>
           <a:prstGeom prst="rect">
             <a:avLst/>
@@ -6583,13 +6636,13 @@
           <a:p>
             <a:pPr algn="r"/>
             <a:r>
-              <a:rPr sz="850" b="0">
+              <a:rPr sz="850" b="0" dirty="0">
                 <a:solidFill>
                   <a:srgbClr val="737373"/>
                 </a:solidFill>
                 <a:latin typeface="Aptos"/>
               </a:rPr>
-              <a:t>Enrico Putzi · TA</a:t>
+              <a:t>Enrico Putzi </a:t>
             </a:r>
           </a:p>
         </p:txBody>

--- a/courses/nus1/files/slides/template.pptx
+++ b/courses/nus1/files/slides/template.pptx
@@ -1,6 +1,6 @@
 
 <file path=ppt/presentation.xml><?xml version="1.0" encoding="utf-8"?>
-<p:presentation xmlns:a="http://schemas.openxmlformats.org/drawingml/2006/main" xmlns:r="http://schemas.openxmlformats.org/officeDocument/2006/relationships" xmlns:p="http://schemas.openxmlformats.org/presentationml/2006/main" saveSubsetFonts="1" autoCompressPictures="0">
+<p:presentation xmlns:a="http://schemas.openxmlformats.org/drawingml/2006/main" xmlns:r="http://schemas.openxmlformats.org/officeDocument/2006/relationships" xmlns:p="http://schemas.openxmlformats.org/presentationml/2006/main" showSpecialPlsOnTitleSld="0" saveSubsetFonts="1" autoCompressPictures="0">
   <p:sldMasterIdLst>
     <p:sldMasterId id="2147483648" r:id="rId1"/>
   </p:sldMasterIdLst>
@@ -995,9 +995,9 @@
           <a:bodyPr/>
           <a:lstStyle/>
           <a:p>
-            <a:fld id="{5BCAD085-E8A6-8845-BD4E-CB4CCA059FC4}" type="datetimeFigureOut">
-              <a:rPr lang="en-US" smtClean="0"/>
-              <a:t>9/14/2026</a:t>
+            <a:fld id="{1841982D-82A2-4E03-A07D-65CA8B5F8742}" type="datetime1">
+              <a:rPr lang="de-CH" smtClean="0"/>
+              <a:t>30.09.2026</a:t>
             </a:fld>
             <a:endParaRPr lang="en-US"/>
           </a:p>
@@ -1018,7 +1018,10 @@
           <a:bodyPr/>
           <a:lstStyle/>
           <a:p>
-            <a:endParaRPr lang="en-US"/>
+            <a:r>
+              <a:rPr lang="en-US"/>
+              <a:t>Enrico Putzi WXX</a:t>
+            </a:r>
           </a:p>
         </p:txBody>
       </p:sp>
@@ -1163,9 +1166,9 @@
           <a:bodyPr/>
           <a:lstStyle/>
           <a:p>
-            <a:fld id="{5BCAD085-E8A6-8845-BD4E-CB4CCA059FC4}" type="datetimeFigureOut">
-              <a:rPr lang="en-US" smtClean="0"/>
-              <a:t>9/14/2026</a:t>
+            <a:fld id="{E537C623-2BE6-40DF-A481-1E3E5DAF3BB1}" type="datetime1">
+              <a:rPr lang="de-CH" smtClean="0"/>
+              <a:t>30.09.2026</a:t>
             </a:fld>
             <a:endParaRPr lang="en-US"/>
           </a:p>
@@ -1186,7 +1189,10 @@
           <a:bodyPr/>
           <a:lstStyle/>
           <a:p>
-            <a:endParaRPr lang="en-US"/>
+            <a:r>
+              <a:rPr lang="en-US"/>
+              <a:t>Enrico Putzi WXX</a:t>
+            </a:r>
           </a:p>
         </p:txBody>
       </p:sp>
@@ -1341,9 +1347,9 @@
           <a:bodyPr/>
           <a:lstStyle/>
           <a:p>
-            <a:fld id="{5BCAD085-E8A6-8845-BD4E-CB4CCA059FC4}" type="datetimeFigureOut">
-              <a:rPr lang="en-US" smtClean="0"/>
-              <a:t>9/14/2026</a:t>
+            <a:fld id="{2387D4E0-9B7E-4417-AEAD-59A9C21D2514}" type="datetime1">
+              <a:rPr lang="de-CH" smtClean="0"/>
+              <a:t>30.09.2026</a:t>
             </a:fld>
             <a:endParaRPr lang="en-US"/>
           </a:p>
@@ -1364,7 +1370,10 @@
           <a:bodyPr/>
           <a:lstStyle/>
           <a:p>
-            <a:endParaRPr lang="en-US"/>
+            <a:r>
+              <a:rPr lang="en-US"/>
+              <a:t>Enrico Putzi WXX</a:t>
+            </a:r>
           </a:p>
         </p:txBody>
       </p:sp>
@@ -1509,9 +1518,9 @@
           <a:bodyPr/>
           <a:lstStyle/>
           <a:p>
-            <a:fld id="{5BCAD085-E8A6-8845-BD4E-CB4CCA059FC4}" type="datetimeFigureOut">
-              <a:rPr lang="en-US" smtClean="0"/>
-              <a:t>9/14/2026</a:t>
+            <a:fld id="{CA814FE1-0FA3-48D7-8958-994BF4919AE6}" type="datetime1">
+              <a:rPr lang="de-CH" smtClean="0"/>
+              <a:t>30.09.2026</a:t>
             </a:fld>
             <a:endParaRPr lang="en-US"/>
           </a:p>
@@ -1532,7 +1541,10 @@
           <a:bodyPr/>
           <a:lstStyle/>
           <a:p>
-            <a:endParaRPr lang="en-US"/>
+            <a:r>
+              <a:rPr lang="en-US"/>
+              <a:t>Enrico Putzi WXX</a:t>
+            </a:r>
           </a:p>
         </p:txBody>
       </p:sp>
@@ -1754,9 +1766,9 @@
           <a:bodyPr/>
           <a:lstStyle/>
           <a:p>
-            <a:fld id="{5BCAD085-E8A6-8845-BD4E-CB4CCA059FC4}" type="datetimeFigureOut">
-              <a:rPr lang="en-US" smtClean="0"/>
-              <a:t>9/14/2026</a:t>
+            <a:fld id="{C893AEC3-33C5-4096-928C-E105753C3DA5}" type="datetime1">
+              <a:rPr lang="de-CH" smtClean="0"/>
+              <a:t>30.09.2026</a:t>
             </a:fld>
             <a:endParaRPr lang="en-US"/>
           </a:p>
@@ -1777,7 +1789,10 @@
           <a:bodyPr/>
           <a:lstStyle/>
           <a:p>
-            <a:endParaRPr lang="en-US"/>
+            <a:r>
+              <a:rPr lang="en-US"/>
+              <a:t>Enrico Putzi WXX</a:t>
+            </a:r>
           </a:p>
         </p:txBody>
       </p:sp>
@@ -2039,9 +2054,9 @@
           <a:bodyPr/>
           <a:lstStyle/>
           <a:p>
-            <a:fld id="{5BCAD085-E8A6-8845-BD4E-CB4CCA059FC4}" type="datetimeFigureOut">
-              <a:rPr lang="en-US" smtClean="0"/>
-              <a:t>9/14/2026</a:t>
+            <a:fld id="{6067A475-4367-4D6E-AD87-3B1FF46691DF}" type="datetime1">
+              <a:rPr lang="de-CH" smtClean="0"/>
+              <a:t>30.09.2026</a:t>
             </a:fld>
             <a:endParaRPr lang="en-US"/>
           </a:p>
@@ -2062,7 +2077,10 @@
           <a:bodyPr/>
           <a:lstStyle/>
           <a:p>
-            <a:endParaRPr lang="en-US"/>
+            <a:r>
+              <a:rPr lang="en-US"/>
+              <a:t>Enrico Putzi WXX</a:t>
+            </a:r>
           </a:p>
         </p:txBody>
       </p:sp>
@@ -2458,9 +2476,9 @@
           <a:bodyPr/>
           <a:lstStyle/>
           <a:p>
-            <a:fld id="{5BCAD085-E8A6-8845-BD4E-CB4CCA059FC4}" type="datetimeFigureOut">
-              <a:rPr lang="en-US" smtClean="0"/>
-              <a:t>9/14/2026</a:t>
+            <a:fld id="{B5B81D07-040C-403D-A621-294731A1A73C}" type="datetime1">
+              <a:rPr lang="de-CH" smtClean="0"/>
+              <a:t>30.09.2026</a:t>
             </a:fld>
             <a:endParaRPr lang="en-US"/>
           </a:p>
@@ -2481,7 +2499,10 @@
           <a:bodyPr/>
           <a:lstStyle/>
           <a:p>
-            <a:endParaRPr lang="en-US"/>
+            <a:r>
+              <a:rPr lang="en-US"/>
+              <a:t>Enrico Putzi WXX</a:t>
+            </a:r>
           </a:p>
         </p:txBody>
       </p:sp>
@@ -2575,9 +2596,9 @@
           <a:bodyPr/>
           <a:lstStyle/>
           <a:p>
-            <a:fld id="{5BCAD085-E8A6-8845-BD4E-CB4CCA059FC4}" type="datetimeFigureOut">
-              <a:rPr lang="en-US" smtClean="0"/>
-              <a:t>9/14/2026</a:t>
+            <a:fld id="{7A084239-FBF7-458E-B3A9-617203C3EFDE}" type="datetime1">
+              <a:rPr lang="de-CH" smtClean="0"/>
+              <a:t>30.09.2026</a:t>
             </a:fld>
             <a:endParaRPr lang="en-US"/>
           </a:p>
@@ -2598,7 +2619,10 @@
           <a:bodyPr/>
           <a:lstStyle/>
           <a:p>
-            <a:endParaRPr lang="en-US"/>
+            <a:r>
+              <a:rPr lang="en-US"/>
+              <a:t>Enrico Putzi WXX</a:t>
+            </a:r>
           </a:p>
         </p:txBody>
       </p:sp>
@@ -2670,9 +2694,9 @@
           <a:bodyPr/>
           <a:lstStyle/>
           <a:p>
-            <a:fld id="{5BCAD085-E8A6-8845-BD4E-CB4CCA059FC4}" type="datetimeFigureOut">
-              <a:rPr lang="en-US" smtClean="0"/>
-              <a:t>9/14/2026</a:t>
+            <a:fld id="{EA470B40-5609-4D0C-9667-2862A3AF6E35}" type="datetime1">
+              <a:rPr lang="de-CH" smtClean="0"/>
+              <a:t>30.09.2026</a:t>
             </a:fld>
             <a:endParaRPr lang="en-US"/>
           </a:p>
@@ -2693,7 +2717,10 @@
           <a:bodyPr/>
           <a:lstStyle/>
           <a:p>
-            <a:endParaRPr lang="en-US"/>
+            <a:r>
+              <a:rPr lang="en-US"/>
+              <a:t>Enrico Putzi WXX</a:t>
+            </a:r>
           </a:p>
         </p:txBody>
       </p:sp>
@@ -2945,9 +2972,9 @@
           <a:bodyPr/>
           <a:lstStyle/>
           <a:p>
-            <a:fld id="{5BCAD085-E8A6-8845-BD4E-CB4CCA059FC4}" type="datetimeFigureOut">
-              <a:rPr lang="en-US" smtClean="0"/>
-              <a:t>9/14/2026</a:t>
+            <a:fld id="{6432A5C9-989E-4915-90A3-748149489DA8}" type="datetime1">
+              <a:rPr lang="de-CH" smtClean="0"/>
+              <a:t>30.09.2026</a:t>
             </a:fld>
             <a:endParaRPr lang="en-US"/>
           </a:p>
@@ -2968,7 +2995,10 @@
           <a:bodyPr/>
           <a:lstStyle/>
           <a:p>
-            <a:endParaRPr lang="en-US"/>
+            <a:r>
+              <a:rPr lang="en-US"/>
+              <a:t>Enrico Putzi WXX</a:t>
+            </a:r>
           </a:p>
         </p:txBody>
       </p:sp>
@@ -3197,9 +3227,9 @@
           <a:bodyPr/>
           <a:lstStyle/>
           <a:p>
-            <a:fld id="{5BCAD085-E8A6-8845-BD4E-CB4CCA059FC4}" type="datetimeFigureOut">
-              <a:rPr lang="en-US" smtClean="0"/>
-              <a:t>9/14/2026</a:t>
+            <a:fld id="{DE5FC3CA-46A9-4BDD-9F7F-F76319CF56C8}" type="datetime1">
+              <a:rPr lang="de-CH" smtClean="0"/>
+              <a:t>30.09.2026</a:t>
             </a:fld>
             <a:endParaRPr lang="en-US"/>
           </a:p>
@@ -3220,7 +3250,10 @@
           <a:bodyPr/>
           <a:lstStyle/>
           <a:p>
-            <a:endParaRPr lang="en-US"/>
+            <a:r>
+              <a:rPr lang="en-US"/>
+              <a:t>Enrico Putzi WXX</a:t>
+            </a:r>
           </a:p>
         </p:txBody>
       </p:sp>
@@ -3408,9 +3441,9 @@
             </a:lvl1pPr>
           </a:lstStyle>
           <a:p>
-            <a:fld id="{5BCAD085-E8A6-8845-BD4E-CB4CCA059FC4}" type="datetimeFigureOut">
-              <a:rPr lang="en-US" smtClean="0"/>
-              <a:t>9/14/2026</a:t>
+            <a:fld id="{1DF76107-2327-4742-820B-1886FFEE5E55}" type="datetime1">
+              <a:rPr lang="de-CH" smtClean="0"/>
+              <a:t>30.09.2026</a:t>
             </a:fld>
             <a:endParaRPr lang="en-US"/>
           </a:p>
@@ -3428,7 +3461,7 @@
         </p:nvSpPr>
         <p:spPr>
           <a:xfrm>
-            <a:off x="3124200" y="6356350"/>
+            <a:off x="6790426" y="6356350"/>
             <a:ext cx="2895600" cy="365125"/>
           </a:xfrm>
           <a:prstGeom prst="rect">
@@ -3449,7 +3482,10 @@
             </a:lvl1pPr>
           </a:lstStyle>
           <a:p>
-            <a:endParaRPr lang="en-US"/>
+            <a:r>
+              <a:rPr lang="en-US"/>
+              <a:t>Enrico Putzi WXX</a:t>
+            </a:r>
           </a:p>
         </p:txBody>
       </p:sp>
@@ -3465,7 +3501,7 @@
         </p:nvSpPr>
         <p:spPr>
           <a:xfrm>
-            <a:off x="6553200" y="6356350"/>
+            <a:off x="9796732" y="6356350"/>
             <a:ext cx="2133600" cy="365125"/>
           </a:xfrm>
           <a:prstGeom prst="rect">
@@ -3515,6 +3551,7 @@
     <p:sldLayoutId id="2147483658" r:id="rId10"/>
     <p:sldLayoutId id="2147483659" r:id="rId11"/>
   </p:sldLayoutIdLst>
+  <p:hf hdr="0"/>
   <p:txStyles>
     <p:titleStyle>
       <a:lvl1pPr algn="ctr" defTabSz="457200" rtl="0" eaLnBrk="1" latinLnBrk="0" hangingPunct="1">
@@ -3774,7 +3811,7 @@
     <p:bg>
       <p:bgPr>
         <a:solidFill>
-          <a:srgbClr val="F7F7F5"/>
+          <a:schemeClr val="bg1"/>
         </a:solidFill>
         <a:effectLst/>
       </p:bgPr>
@@ -3945,7 +3982,7 @@
         </p:nvSpPr>
         <p:spPr>
           <a:xfrm>
-            <a:off x="612648" y="3246120"/>
+            <a:off x="612648" y="3255264"/>
             <a:ext cx="1175002" cy="323165"/>
           </a:xfrm>
           <a:prstGeom prst="rect">
@@ -4290,7 +4327,7 @@
     <p:bg>
       <p:bgPr>
         <a:solidFill>
-          <a:srgbClr val="F7F7F5"/>
+          <a:schemeClr val="bg1"/>
         </a:solidFill>
         <a:effectLst/>
       </p:bgPr>
@@ -4460,152 +4497,6 @@
           </a:p>
         </p:txBody>
       </p:sp>
-      <p:cxnSp>
-        <p:nvCxnSpPr>
-          <p:cNvPr id="6" name="Connector 5"/>
-          <p:cNvCxnSpPr/>
-          <p:nvPr/>
-        </p:nvCxnSpPr>
-        <p:spPr>
-          <a:xfrm>
-            <a:off x="594360" y="6446520"/>
-            <a:ext cx="10972800" cy="0"/>
-          </a:xfrm>
-          <a:prstGeom prst="line">
-            <a:avLst/>
-          </a:prstGeom>
-          <a:ln w="12700">
-            <a:solidFill>
-              <a:srgbClr val="E8E8E5"/>
-            </a:solidFill>
-          </a:ln>
-        </p:spPr>
-        <p:style>
-          <a:lnRef idx="2">
-            <a:schemeClr val="accent1"/>
-          </a:lnRef>
-          <a:fillRef idx="0">
-            <a:schemeClr val="accent1"/>
-          </a:fillRef>
-          <a:effectRef idx="1">
-            <a:schemeClr val="accent1"/>
-          </a:effectRef>
-          <a:fontRef idx="minor">
-            <a:schemeClr val="tx1"/>
-          </a:fontRef>
-        </p:style>
-      </p:cxnSp>
-      <p:sp>
-        <p:nvSpPr>
-          <p:cNvPr id="7" name="TextBox 6"/>
-          <p:cNvSpPr txBox="1"/>
-          <p:nvPr/>
-        </p:nvSpPr>
-        <p:spPr>
-          <a:xfrm>
-            <a:off x="594360" y="6492240"/>
-            <a:ext cx="1554480" cy="201168"/>
-          </a:xfrm>
-          <a:prstGeom prst="rect">
-            <a:avLst/>
-          </a:prstGeom>
-          <a:noFill/>
-        </p:spPr>
-        <p:txBody>
-          <a:bodyPr wrap="none" lIns="0" tIns="0" rIns="0" bIns="0" anchor="t">
-            <a:spAutoFit/>
-          </a:bodyPr>
-          <a:lstStyle/>
-          <a:p>
-            <a:pPr algn="l"/>
-            <a:r>
-              <a:rPr sz="850" b="1">
-                <a:solidFill>
-                  <a:srgbClr val="737373"/>
-                </a:solidFill>
-                <a:latin typeface="Aptos"/>
-              </a:rPr>
-              <a:t>NUS1 · ÜBUNG</a:t>
-            </a:r>
-          </a:p>
-        </p:txBody>
-      </p:sp>
-      <p:sp>
-        <p:nvSpPr>
-          <p:cNvPr id="8" name="TextBox 7"/>
-          <p:cNvSpPr txBox="1"/>
-          <p:nvPr/>
-        </p:nvSpPr>
-        <p:spPr>
-          <a:xfrm>
-            <a:off x="10074076" y="6492240"/>
-            <a:ext cx="578684" cy="130805"/>
-          </a:xfrm>
-          <a:prstGeom prst="rect">
-            <a:avLst/>
-          </a:prstGeom>
-          <a:noFill/>
-        </p:spPr>
-        <p:txBody>
-          <a:bodyPr wrap="none" lIns="0" tIns="0" rIns="0" bIns="0" anchor="t">
-            <a:spAutoFit/>
-          </a:bodyPr>
-          <a:lstStyle/>
-          <a:p>
-            <a:pPr algn="r"/>
-            <a:r>
-              <a:rPr sz="850" b="0" dirty="0">
-                <a:solidFill>
-                  <a:srgbClr val="737373"/>
-                </a:solidFill>
-                <a:latin typeface="Aptos"/>
-              </a:rPr>
-              <a:t>Enrico Putzi </a:t>
-            </a:r>
-            <a:endParaRPr lang="de-CH" sz="850" dirty="0">
-              <a:solidFill>
-                <a:srgbClr val="737373"/>
-              </a:solidFill>
-              <a:latin typeface="Aptos"/>
-            </a:endParaRPr>
-          </a:p>
-        </p:txBody>
-      </p:sp>
-      <p:sp>
-        <p:nvSpPr>
-          <p:cNvPr id="9" name="TextBox 8"/>
-          <p:cNvSpPr txBox="1"/>
-          <p:nvPr/>
-        </p:nvSpPr>
-        <p:spPr>
-          <a:xfrm>
-            <a:off x="10835640" y="6492240"/>
-            <a:ext cx="731520" cy="201168"/>
-          </a:xfrm>
-          <a:prstGeom prst="rect">
-            <a:avLst/>
-          </a:prstGeom>
-          <a:noFill/>
-        </p:spPr>
-        <p:txBody>
-          <a:bodyPr wrap="none" lIns="0" tIns="0" rIns="0" bIns="0" anchor="t">
-            <a:spAutoFit/>
-          </a:bodyPr>
-          <a:lstStyle/>
-          <a:p>
-            <a:pPr algn="r"/>
-            <a:r>
-              <a:rPr sz="850" b="1">
-                <a:solidFill>
-                  <a:srgbClr val="737373"/>
-                </a:solidFill>
-                <a:latin typeface="Aptos"/>
-              </a:rPr>
-              <a:t>W01</a:t>
-            </a:r>
-          </a:p>
-        </p:txBody>
-      </p:sp>
       <p:sp>
         <p:nvSpPr>
           <p:cNvPr id="11" name="TextBox 10"/>
@@ -4750,36 +4641,87 @@
       </p:sp>
       <p:sp>
         <p:nvSpPr>
-          <p:cNvPr id="12" name="TextBox 11"/>
-          <p:cNvSpPr txBox="1"/>
-          <p:nvPr/>
-        </p:nvSpPr>
-        <p:spPr>
-          <a:xfrm>
-            <a:off x="914400" y="5138928"/>
-            <a:ext cx="3657600" cy="320040"/>
-          </a:xfrm>
-          <a:prstGeom prst="rect">
-            <a:avLst/>
-          </a:prstGeom>
-          <a:noFill/>
-        </p:spPr>
-        <p:txBody>
-          <a:bodyPr wrap="none" lIns="0" tIns="0" rIns="0" bIns="0" anchor="t">
-            <a:spAutoFit/>
-          </a:bodyPr>
-          <a:lstStyle/>
-          <a:p>
-            <a:pPr algn="l"/>
-            <a:r>
-              <a:rPr sz="1050" b="0">
-                <a:solidFill>
-                  <a:srgbClr val="737373"/>
-                </a:solidFill>
-                <a:latin typeface="Aptos"/>
-              </a:rPr>
-              <a:t>→ nur das, was auf die Übung einzahlt</a:t>
-            </a:r>
+          <p:cNvPr id="15" name="Datumsplatzhalter 14">
+            <a:extLst>
+              <a:ext uri="{FF2B5EF4-FFF2-40B4-BE49-F238E27FC236}">
+                <a16:creationId xmlns:a16="http://schemas.microsoft.com/office/drawing/2014/main" id="{FA1345AC-CE9B-7FE2-5382-D92AEFB1F35A}"/>
+              </a:ext>
+            </a:extLst>
+          </p:cNvPr>
+          <p:cNvSpPr>
+            <a:spLocks noGrp="1"/>
+          </p:cNvSpPr>
+          <p:nvPr>
+            <p:ph type="dt" sz="half" idx="10"/>
+          </p:nvPr>
+        </p:nvSpPr>
+        <p:spPr/>
+        <p:txBody>
+          <a:bodyPr/>
+          <a:lstStyle/>
+          <a:p>
+            <a:fld id="{77A2E3E8-6F8A-4A2D-87B8-002A9DB830F0}" type="datetime1">
+              <a:rPr lang="de-CH" smtClean="0"/>
+              <a:t>30.09.2026</a:t>
+            </a:fld>
+            <a:endParaRPr lang="en-US"/>
+          </a:p>
+        </p:txBody>
+      </p:sp>
+      <p:sp>
+        <p:nvSpPr>
+          <p:cNvPr id="16" name="Fußzeilenplatzhalter 15">
+            <a:extLst>
+              <a:ext uri="{FF2B5EF4-FFF2-40B4-BE49-F238E27FC236}">
+                <a16:creationId xmlns:a16="http://schemas.microsoft.com/office/drawing/2014/main" id="{5890F6DA-FF1C-B12F-C9A4-D27FAC23DAF3}"/>
+              </a:ext>
+            </a:extLst>
+          </p:cNvPr>
+          <p:cNvSpPr>
+            <a:spLocks noGrp="1"/>
+          </p:cNvSpPr>
+          <p:nvPr>
+            <p:ph type="ftr" sz="quarter" idx="11"/>
+          </p:nvPr>
+        </p:nvSpPr>
+        <p:spPr/>
+        <p:txBody>
+          <a:bodyPr/>
+          <a:lstStyle/>
+          <a:p>
+            <a:r>
+              <a:rPr lang="en-US"/>
+              <a:t>Enrico Putzi WXX</a:t>
+            </a:r>
+          </a:p>
+        </p:txBody>
+      </p:sp>
+      <p:sp>
+        <p:nvSpPr>
+          <p:cNvPr id="17" name="Foliennummernplatzhalter 16">
+            <a:extLst>
+              <a:ext uri="{FF2B5EF4-FFF2-40B4-BE49-F238E27FC236}">
+                <a16:creationId xmlns:a16="http://schemas.microsoft.com/office/drawing/2014/main" id="{00071AF8-AC7C-5E34-152B-776853FD6453}"/>
+              </a:ext>
+            </a:extLst>
+          </p:cNvPr>
+          <p:cNvSpPr>
+            <a:spLocks noGrp="1"/>
+          </p:cNvSpPr>
+          <p:nvPr>
+            <p:ph type="sldNum" sz="quarter" idx="12"/>
+          </p:nvPr>
+        </p:nvSpPr>
+        <p:spPr/>
+        <p:txBody>
+          <a:bodyPr/>
+          <a:lstStyle/>
+          <a:p>
+            <a:fld id="{C1FF6DA9-008F-8B48-92A6-B652298478BF}" type="slidenum">
+              <a:rPr lang="en-US" smtClean="0"/>
+              <a:t>2</a:t>
+            </a:fld>
+            <a:endParaRPr lang="en-US"/>
           </a:p>
         </p:txBody>
       </p:sp>
@@ -4797,7 +4739,7 @@
     <p:bg>
       <p:bgPr>
         <a:solidFill>
-          <a:srgbClr val="F7F7F5"/>
+          <a:schemeClr val="bg1"/>
         </a:solidFill>
         <a:effectLst/>
       </p:bgPr>
@@ -4967,51 +4909,16 @@
           </a:p>
         </p:txBody>
       </p:sp>
-      <p:cxnSp>
-        <p:nvCxnSpPr>
-          <p:cNvPr id="6" name="Connector 5"/>
-          <p:cNvCxnSpPr/>
-          <p:nvPr/>
-        </p:nvCxnSpPr>
-        <p:spPr>
-          <a:xfrm>
-            <a:off x="594360" y="6446520"/>
-            <a:ext cx="10972800" cy="0"/>
-          </a:xfrm>
-          <a:prstGeom prst="line">
-            <a:avLst/>
-          </a:prstGeom>
-          <a:ln w="12700">
-            <a:solidFill>
-              <a:srgbClr val="E8E8E5"/>
-            </a:solidFill>
-          </a:ln>
-        </p:spPr>
-        <p:style>
-          <a:lnRef idx="2">
-            <a:schemeClr val="accent1"/>
-          </a:lnRef>
-          <a:fillRef idx="0">
-            <a:schemeClr val="accent1"/>
-          </a:fillRef>
-          <a:effectRef idx="1">
-            <a:schemeClr val="accent1"/>
-          </a:effectRef>
-          <a:fontRef idx="minor">
-            <a:schemeClr val="tx1"/>
-          </a:fontRef>
-        </p:style>
-      </p:cxnSp>
-      <p:sp>
-        <p:nvSpPr>
-          <p:cNvPr id="7" name="TextBox 6"/>
+      <p:sp>
+        <p:nvSpPr>
+          <p:cNvPr id="11" name="TextBox 10"/>
           <p:cNvSpPr txBox="1"/>
           <p:nvPr/>
         </p:nvSpPr>
         <p:spPr>
           <a:xfrm>
-            <a:off x="594360" y="6492240"/>
-            <a:ext cx="1554480" cy="201168"/>
+            <a:off x="868680" y="3767328"/>
+            <a:ext cx="10424160" cy="502920"/>
           </a:xfrm>
           <a:prstGeom prst="rect">
             <a:avLst/>
@@ -5024,117 +4931,6 @@
           </a:bodyPr>
           <a:lstStyle/>
           <a:p>
-            <a:pPr algn="l"/>
-            <a:r>
-              <a:rPr sz="850" b="1">
-                <a:solidFill>
-                  <a:srgbClr val="737373"/>
-                </a:solidFill>
-                <a:latin typeface="Aptos"/>
-              </a:rPr>
-              <a:t>NUS1 · ÜBUNG</a:t>
-            </a:r>
-          </a:p>
-        </p:txBody>
-      </p:sp>
-      <p:sp>
-        <p:nvSpPr>
-          <p:cNvPr id="8" name="TextBox 7"/>
-          <p:cNvSpPr txBox="1"/>
-          <p:nvPr/>
-        </p:nvSpPr>
-        <p:spPr>
-          <a:xfrm>
-            <a:off x="10096518" y="6492240"/>
-            <a:ext cx="556242" cy="130805"/>
-          </a:xfrm>
-          <a:prstGeom prst="rect">
-            <a:avLst/>
-          </a:prstGeom>
-          <a:noFill/>
-        </p:spPr>
-        <p:txBody>
-          <a:bodyPr wrap="none" lIns="0" tIns="0" rIns="0" bIns="0" anchor="t">
-            <a:spAutoFit/>
-          </a:bodyPr>
-          <a:lstStyle/>
-          <a:p>
-            <a:pPr algn="r"/>
-            <a:r>
-              <a:rPr sz="850" b="0" dirty="0">
-                <a:solidFill>
-                  <a:srgbClr val="737373"/>
-                </a:solidFill>
-                <a:latin typeface="Aptos"/>
-              </a:rPr>
-              <a:t>Enrico Putzi</a:t>
-            </a:r>
-            <a:endParaRPr lang="de-CH" sz="850" b="0" dirty="0">
-              <a:solidFill>
-                <a:srgbClr val="737373"/>
-              </a:solidFill>
-              <a:latin typeface="Aptos"/>
-            </a:endParaRPr>
-          </a:p>
-        </p:txBody>
-      </p:sp>
-      <p:sp>
-        <p:nvSpPr>
-          <p:cNvPr id="9" name="TextBox 8"/>
-          <p:cNvSpPr txBox="1"/>
-          <p:nvPr/>
-        </p:nvSpPr>
-        <p:spPr>
-          <a:xfrm>
-            <a:off x="10835640" y="6492240"/>
-            <a:ext cx="731520" cy="201168"/>
-          </a:xfrm>
-          <a:prstGeom prst="rect">
-            <a:avLst/>
-          </a:prstGeom>
-          <a:noFill/>
-        </p:spPr>
-        <p:txBody>
-          <a:bodyPr wrap="none" lIns="0" tIns="0" rIns="0" bIns="0" anchor="t">
-            <a:spAutoFit/>
-          </a:bodyPr>
-          <a:lstStyle/>
-          <a:p>
-            <a:pPr algn="r"/>
-            <a:r>
-              <a:rPr sz="850" b="1">
-                <a:solidFill>
-                  <a:srgbClr val="737373"/>
-                </a:solidFill>
-                <a:latin typeface="Aptos"/>
-              </a:rPr>
-              <a:t>W01</a:t>
-            </a:r>
-          </a:p>
-        </p:txBody>
-      </p:sp>
-      <p:sp>
-        <p:nvSpPr>
-          <p:cNvPr id="11" name="TextBox 10"/>
-          <p:cNvSpPr txBox="1"/>
-          <p:nvPr/>
-        </p:nvSpPr>
-        <p:spPr>
-          <a:xfrm>
-            <a:off x="868680" y="3767328"/>
-            <a:ext cx="10424160" cy="502920"/>
-          </a:xfrm>
-          <a:prstGeom prst="rect">
-            <a:avLst/>
-          </a:prstGeom>
-          <a:noFill/>
-        </p:spPr>
-        <p:txBody>
-          <a:bodyPr wrap="none" lIns="0" tIns="0" rIns="0" bIns="0" anchor="t">
-            <a:spAutoFit/>
-          </a:bodyPr>
-          <a:lstStyle/>
-          <a:p>
             <a:pPr algn="ctr"/>
             <a:r>
               <a:rPr sz="1800" b="0">
@@ -5145,6 +4941,92 @@
               </a:rPr>
               <a:t>[Grosses Bild / Schaltung / Diagramm / Aufgabe]</a:t>
             </a:r>
+          </a:p>
+        </p:txBody>
+      </p:sp>
+      <p:sp>
+        <p:nvSpPr>
+          <p:cNvPr id="14" name="Datumsplatzhalter 13">
+            <a:extLst>
+              <a:ext uri="{FF2B5EF4-FFF2-40B4-BE49-F238E27FC236}">
+                <a16:creationId xmlns:a16="http://schemas.microsoft.com/office/drawing/2014/main" id="{5EF46576-0B1E-9847-8766-0E9569B3FF80}"/>
+              </a:ext>
+            </a:extLst>
+          </p:cNvPr>
+          <p:cNvSpPr>
+            <a:spLocks noGrp="1"/>
+          </p:cNvSpPr>
+          <p:nvPr>
+            <p:ph type="dt" sz="half" idx="10"/>
+          </p:nvPr>
+        </p:nvSpPr>
+        <p:spPr/>
+        <p:txBody>
+          <a:bodyPr/>
+          <a:lstStyle/>
+          <a:p>
+            <a:fld id="{497E40BA-CE70-4E4C-B484-B26569D677F9}" type="datetime1">
+              <a:rPr lang="de-CH" smtClean="0"/>
+              <a:t>30.09.2026</a:t>
+            </a:fld>
+            <a:endParaRPr lang="en-US"/>
+          </a:p>
+        </p:txBody>
+      </p:sp>
+      <p:sp>
+        <p:nvSpPr>
+          <p:cNvPr id="15" name="Fußzeilenplatzhalter 14">
+            <a:extLst>
+              <a:ext uri="{FF2B5EF4-FFF2-40B4-BE49-F238E27FC236}">
+                <a16:creationId xmlns:a16="http://schemas.microsoft.com/office/drawing/2014/main" id="{7A7E31E1-BB78-4CD2-657F-DF3133F68E82}"/>
+              </a:ext>
+            </a:extLst>
+          </p:cNvPr>
+          <p:cNvSpPr>
+            <a:spLocks noGrp="1"/>
+          </p:cNvSpPr>
+          <p:nvPr>
+            <p:ph type="ftr" sz="quarter" idx="11"/>
+          </p:nvPr>
+        </p:nvSpPr>
+        <p:spPr/>
+        <p:txBody>
+          <a:bodyPr/>
+          <a:lstStyle/>
+          <a:p>
+            <a:r>
+              <a:rPr lang="en-US"/>
+              <a:t>Enrico Putzi WXX</a:t>
+            </a:r>
+          </a:p>
+        </p:txBody>
+      </p:sp>
+      <p:sp>
+        <p:nvSpPr>
+          <p:cNvPr id="16" name="Foliennummernplatzhalter 15">
+            <a:extLst>
+              <a:ext uri="{FF2B5EF4-FFF2-40B4-BE49-F238E27FC236}">
+                <a16:creationId xmlns:a16="http://schemas.microsoft.com/office/drawing/2014/main" id="{7A63EF0B-ADFA-2644-5D9C-48A50080E1C3}"/>
+              </a:ext>
+            </a:extLst>
+          </p:cNvPr>
+          <p:cNvSpPr>
+            <a:spLocks noGrp="1"/>
+          </p:cNvSpPr>
+          <p:nvPr>
+            <p:ph type="sldNum" sz="quarter" idx="12"/>
+          </p:nvPr>
+        </p:nvSpPr>
+        <p:spPr/>
+        <p:txBody>
+          <a:bodyPr/>
+          <a:lstStyle/>
+          <a:p>
+            <a:fld id="{C1FF6DA9-008F-8B48-92A6-B652298478BF}" type="slidenum">
+              <a:rPr lang="en-US" smtClean="0"/>
+              <a:t>3</a:t>
+            </a:fld>
+            <a:endParaRPr lang="en-US"/>
           </a:p>
         </p:txBody>
       </p:sp>
@@ -5162,7 +5044,7 @@
     <p:bg>
       <p:bgPr>
         <a:solidFill>
-          <a:srgbClr val="F7F7F5"/>
+          <a:schemeClr val="bg1"/>
         </a:solidFill>
         <a:effectLst/>
       </p:bgPr>
@@ -5368,51 +5250,16 @@
           </a:p>
         </p:txBody>
       </p:sp>
-      <p:cxnSp>
-        <p:nvCxnSpPr>
-          <p:cNvPr id="6" name="Connector 5"/>
-          <p:cNvCxnSpPr/>
-          <p:nvPr/>
-        </p:nvCxnSpPr>
-        <p:spPr>
-          <a:xfrm>
-            <a:off x="594360" y="6446520"/>
-            <a:ext cx="10972800" cy="0"/>
-          </a:xfrm>
-          <a:prstGeom prst="line">
-            <a:avLst/>
-          </a:prstGeom>
-          <a:ln w="12700">
-            <a:solidFill>
-              <a:srgbClr val="E8E8E5"/>
-            </a:solidFill>
-          </a:ln>
-        </p:spPr>
-        <p:style>
-          <a:lnRef idx="2">
-            <a:schemeClr val="accent1"/>
-          </a:lnRef>
-          <a:fillRef idx="0">
-            <a:schemeClr val="accent1"/>
-          </a:fillRef>
-          <a:effectRef idx="1">
-            <a:schemeClr val="accent1"/>
-          </a:effectRef>
-          <a:fontRef idx="minor">
-            <a:schemeClr val="tx1"/>
-          </a:fontRef>
-        </p:style>
-      </p:cxnSp>
-      <p:sp>
-        <p:nvSpPr>
-          <p:cNvPr id="7" name="TextBox 6"/>
+      <p:sp>
+        <p:nvSpPr>
+          <p:cNvPr id="11" name="TextBox 10"/>
           <p:cNvSpPr txBox="1"/>
           <p:nvPr/>
         </p:nvSpPr>
         <p:spPr>
           <a:xfrm>
-            <a:off x="594360" y="6492240"/>
-            <a:ext cx="1554480" cy="201168"/>
+            <a:off x="914400" y="2880360"/>
+            <a:ext cx="10332720" cy="1051560"/>
           </a:xfrm>
           <a:prstGeom prst="rect">
             <a:avLst/>
@@ -5420,34 +5267,34 @@
           <a:noFill/>
         </p:spPr>
         <p:txBody>
-          <a:bodyPr wrap="none" lIns="0" tIns="0" rIns="0" bIns="0" anchor="t">
+          <a:bodyPr wrap="none" lIns="0" tIns="0" rIns="0" bIns="0" anchor="ctr">
             <a:spAutoFit/>
           </a:bodyPr>
           <a:lstStyle/>
           <a:p>
-            <a:pPr algn="l"/>
-            <a:r>
-              <a:rPr sz="850" b="1">
-                <a:solidFill>
-                  <a:srgbClr val="737373"/>
+            <a:pPr algn="ctr"/>
+            <a:r>
+              <a:rPr sz="2900" b="1">
+                <a:solidFill>
+                  <a:srgbClr val="171717"/>
                 </a:solidFill>
                 <a:latin typeface="Aptos"/>
               </a:rPr>
-              <a:t>NUS1 · ÜBUNG</a:t>
-            </a:r>
-          </a:p>
-        </p:txBody>
-      </p:sp>
-      <p:sp>
-        <p:nvSpPr>
-          <p:cNvPr id="8" name="TextBox 7"/>
+              <a:t>[Formel / Rechnung / Lösungsweg]</a:t>
+            </a:r>
+          </a:p>
+        </p:txBody>
+      </p:sp>
+      <p:sp>
+        <p:nvSpPr>
+          <p:cNvPr id="12" name="TextBox 11"/>
           <p:cNvSpPr txBox="1"/>
           <p:nvPr/>
         </p:nvSpPr>
         <p:spPr>
           <a:xfrm>
-            <a:off x="10096518" y="6492240"/>
-            <a:ext cx="556242" cy="130805"/>
+            <a:off x="914400" y="4315968"/>
+            <a:ext cx="10332720" cy="457200"/>
           </a:xfrm>
           <a:prstGeom prst="rect">
             <a:avLst/>
@@ -5460,111 +5307,6 @@
           </a:bodyPr>
           <a:lstStyle/>
           <a:p>
-            <a:pPr algn="r"/>
-            <a:r>
-              <a:rPr sz="850" b="0" dirty="0">
-                <a:solidFill>
-                  <a:srgbClr val="737373"/>
-                </a:solidFill>
-                <a:latin typeface="Aptos"/>
-              </a:rPr>
-              <a:t>Enrico Putzi</a:t>
-            </a:r>
-          </a:p>
-        </p:txBody>
-      </p:sp>
-      <p:sp>
-        <p:nvSpPr>
-          <p:cNvPr id="9" name="TextBox 8"/>
-          <p:cNvSpPr txBox="1"/>
-          <p:nvPr/>
-        </p:nvSpPr>
-        <p:spPr>
-          <a:xfrm>
-            <a:off x="10835640" y="6492240"/>
-            <a:ext cx="731520" cy="201168"/>
-          </a:xfrm>
-          <a:prstGeom prst="rect">
-            <a:avLst/>
-          </a:prstGeom>
-          <a:noFill/>
-        </p:spPr>
-        <p:txBody>
-          <a:bodyPr wrap="none" lIns="0" tIns="0" rIns="0" bIns="0" anchor="t">
-            <a:spAutoFit/>
-          </a:bodyPr>
-          <a:lstStyle/>
-          <a:p>
-            <a:pPr algn="r"/>
-            <a:r>
-              <a:rPr sz="850" b="1">
-                <a:solidFill>
-                  <a:srgbClr val="737373"/>
-                </a:solidFill>
-                <a:latin typeface="Aptos"/>
-              </a:rPr>
-              <a:t>W01</a:t>
-            </a:r>
-          </a:p>
-        </p:txBody>
-      </p:sp>
-      <p:sp>
-        <p:nvSpPr>
-          <p:cNvPr id="11" name="TextBox 10"/>
-          <p:cNvSpPr txBox="1"/>
-          <p:nvPr/>
-        </p:nvSpPr>
-        <p:spPr>
-          <a:xfrm>
-            <a:off x="914400" y="2880360"/>
-            <a:ext cx="10332720" cy="1051560"/>
-          </a:xfrm>
-          <a:prstGeom prst="rect">
-            <a:avLst/>
-          </a:prstGeom>
-          <a:noFill/>
-        </p:spPr>
-        <p:txBody>
-          <a:bodyPr wrap="none" lIns="0" tIns="0" rIns="0" bIns="0" anchor="ctr">
-            <a:spAutoFit/>
-          </a:bodyPr>
-          <a:lstStyle/>
-          <a:p>
-            <a:pPr algn="ctr"/>
-            <a:r>
-              <a:rPr sz="2900" b="1">
-                <a:solidFill>
-                  <a:srgbClr val="171717"/>
-                </a:solidFill>
-                <a:latin typeface="Aptos"/>
-              </a:rPr>
-              <a:t>[Formel / Rechnung / Lösungsweg]</a:t>
-            </a:r>
-          </a:p>
-        </p:txBody>
-      </p:sp>
-      <p:sp>
-        <p:nvSpPr>
-          <p:cNvPr id="12" name="TextBox 11"/>
-          <p:cNvSpPr txBox="1"/>
-          <p:nvPr/>
-        </p:nvSpPr>
-        <p:spPr>
-          <a:xfrm>
-            <a:off x="914400" y="4315968"/>
-            <a:ext cx="10332720" cy="457200"/>
-          </a:xfrm>
-          <a:prstGeom prst="rect">
-            <a:avLst/>
-          </a:prstGeom>
-          <a:noFill/>
-        </p:spPr>
-        <p:txBody>
-          <a:bodyPr wrap="none" lIns="0" tIns="0" rIns="0" bIns="0" anchor="t">
-            <a:spAutoFit/>
-          </a:bodyPr>
-          <a:lstStyle/>
-          <a:p>
             <a:pPr algn="ctr"/>
             <a:r>
               <a:rPr sz="1400" b="0">
@@ -5575,6 +5317,92 @@
               </a:rPr>
               <a:t>Zwischenschritte / kurze Hinweise</a:t>
             </a:r>
+          </a:p>
+        </p:txBody>
+      </p:sp>
+      <p:sp>
+        <p:nvSpPr>
+          <p:cNvPr id="15" name="Datumsplatzhalter 14">
+            <a:extLst>
+              <a:ext uri="{FF2B5EF4-FFF2-40B4-BE49-F238E27FC236}">
+                <a16:creationId xmlns:a16="http://schemas.microsoft.com/office/drawing/2014/main" id="{664F4938-3C90-8550-ECBE-BC5D8AC4BDB3}"/>
+              </a:ext>
+            </a:extLst>
+          </p:cNvPr>
+          <p:cNvSpPr>
+            <a:spLocks noGrp="1"/>
+          </p:cNvSpPr>
+          <p:nvPr>
+            <p:ph type="dt" sz="half" idx="10"/>
+          </p:nvPr>
+        </p:nvSpPr>
+        <p:spPr/>
+        <p:txBody>
+          <a:bodyPr/>
+          <a:lstStyle/>
+          <a:p>
+            <a:fld id="{182A7AC6-7431-48B9-BAC6-F1C873F640C5}" type="datetime1">
+              <a:rPr lang="de-CH" smtClean="0"/>
+              <a:t>30.09.2026</a:t>
+            </a:fld>
+            <a:endParaRPr lang="en-US" dirty="0"/>
+          </a:p>
+        </p:txBody>
+      </p:sp>
+      <p:sp>
+        <p:nvSpPr>
+          <p:cNvPr id="16" name="Fußzeilenplatzhalter 15">
+            <a:extLst>
+              <a:ext uri="{FF2B5EF4-FFF2-40B4-BE49-F238E27FC236}">
+                <a16:creationId xmlns:a16="http://schemas.microsoft.com/office/drawing/2014/main" id="{7A457ED8-9A9A-4423-A481-F578F5884406}"/>
+              </a:ext>
+            </a:extLst>
+          </p:cNvPr>
+          <p:cNvSpPr>
+            <a:spLocks noGrp="1"/>
+          </p:cNvSpPr>
+          <p:nvPr>
+            <p:ph type="ftr" sz="quarter" idx="11"/>
+          </p:nvPr>
+        </p:nvSpPr>
+        <p:spPr/>
+        <p:txBody>
+          <a:bodyPr/>
+          <a:lstStyle/>
+          <a:p>
+            <a:r>
+              <a:rPr lang="en-US"/>
+              <a:t>Enrico Putzi WXX</a:t>
+            </a:r>
+          </a:p>
+        </p:txBody>
+      </p:sp>
+      <p:sp>
+        <p:nvSpPr>
+          <p:cNvPr id="17" name="Foliennummernplatzhalter 16">
+            <a:extLst>
+              <a:ext uri="{FF2B5EF4-FFF2-40B4-BE49-F238E27FC236}">
+                <a16:creationId xmlns:a16="http://schemas.microsoft.com/office/drawing/2014/main" id="{D79ADE14-5D9B-FFFF-E4FB-168005707045}"/>
+              </a:ext>
+            </a:extLst>
+          </p:cNvPr>
+          <p:cNvSpPr>
+            <a:spLocks noGrp="1"/>
+          </p:cNvSpPr>
+          <p:nvPr>
+            <p:ph type="sldNum" sz="quarter" idx="12"/>
+          </p:nvPr>
+        </p:nvSpPr>
+        <p:spPr/>
+        <p:txBody>
+          <a:bodyPr/>
+          <a:lstStyle/>
+          <a:p>
+            <a:fld id="{C1FF6DA9-008F-8B48-92A6-B652298478BF}" type="slidenum">
+              <a:rPr lang="en-US" smtClean="0"/>
+              <a:t>4</a:t>
+            </a:fld>
+            <a:endParaRPr lang="en-US"/>
           </a:p>
         </p:txBody>
       </p:sp>
@@ -5592,7 +5420,7 @@
     <p:bg>
       <p:bgPr>
         <a:solidFill>
-          <a:srgbClr val="F7F7F5"/>
+          <a:schemeClr val="bg1"/>
         </a:solidFill>
         <a:effectLst/>
       </p:bgPr>
@@ -5762,146 +5590,6 @@
           </a:p>
         </p:txBody>
       </p:sp>
-      <p:cxnSp>
-        <p:nvCxnSpPr>
-          <p:cNvPr id="6" name="Connector 5"/>
-          <p:cNvCxnSpPr/>
-          <p:nvPr/>
-        </p:nvCxnSpPr>
-        <p:spPr>
-          <a:xfrm>
-            <a:off x="594360" y="6446520"/>
-            <a:ext cx="10972800" cy="0"/>
-          </a:xfrm>
-          <a:prstGeom prst="line">
-            <a:avLst/>
-          </a:prstGeom>
-          <a:ln w="12700">
-            <a:solidFill>
-              <a:srgbClr val="E8E8E5"/>
-            </a:solidFill>
-          </a:ln>
-        </p:spPr>
-        <p:style>
-          <a:lnRef idx="2">
-            <a:schemeClr val="accent1"/>
-          </a:lnRef>
-          <a:fillRef idx="0">
-            <a:schemeClr val="accent1"/>
-          </a:fillRef>
-          <a:effectRef idx="1">
-            <a:schemeClr val="accent1"/>
-          </a:effectRef>
-          <a:fontRef idx="minor">
-            <a:schemeClr val="tx1"/>
-          </a:fontRef>
-        </p:style>
-      </p:cxnSp>
-      <p:sp>
-        <p:nvSpPr>
-          <p:cNvPr id="7" name="TextBox 6"/>
-          <p:cNvSpPr txBox="1"/>
-          <p:nvPr/>
-        </p:nvSpPr>
-        <p:spPr>
-          <a:xfrm>
-            <a:off x="594360" y="6492240"/>
-            <a:ext cx="1554480" cy="201168"/>
-          </a:xfrm>
-          <a:prstGeom prst="rect">
-            <a:avLst/>
-          </a:prstGeom>
-          <a:noFill/>
-        </p:spPr>
-        <p:txBody>
-          <a:bodyPr wrap="none" lIns="0" tIns="0" rIns="0" bIns="0" anchor="t">
-            <a:spAutoFit/>
-          </a:bodyPr>
-          <a:lstStyle/>
-          <a:p>
-            <a:pPr algn="l"/>
-            <a:r>
-              <a:rPr sz="850" b="1">
-                <a:solidFill>
-                  <a:srgbClr val="737373"/>
-                </a:solidFill>
-                <a:latin typeface="Aptos"/>
-              </a:rPr>
-              <a:t>NUS1 · ÜBUNG</a:t>
-            </a:r>
-          </a:p>
-        </p:txBody>
-      </p:sp>
-      <p:sp>
-        <p:nvSpPr>
-          <p:cNvPr id="8" name="TextBox 7"/>
-          <p:cNvSpPr txBox="1"/>
-          <p:nvPr/>
-        </p:nvSpPr>
-        <p:spPr>
-          <a:xfrm>
-            <a:off x="10096518" y="6492240"/>
-            <a:ext cx="556242" cy="130805"/>
-          </a:xfrm>
-          <a:prstGeom prst="rect">
-            <a:avLst/>
-          </a:prstGeom>
-          <a:noFill/>
-        </p:spPr>
-        <p:txBody>
-          <a:bodyPr wrap="none" lIns="0" tIns="0" rIns="0" bIns="0" anchor="t">
-            <a:spAutoFit/>
-          </a:bodyPr>
-          <a:lstStyle/>
-          <a:p>
-            <a:pPr algn="r"/>
-            <a:r>
-              <a:rPr sz="850" b="0" dirty="0">
-                <a:solidFill>
-                  <a:srgbClr val="737373"/>
-                </a:solidFill>
-                <a:latin typeface="Aptos"/>
-              </a:rPr>
-              <a:t>Enrico Putzi</a:t>
-            </a:r>
-          </a:p>
-        </p:txBody>
-      </p:sp>
-      <p:sp>
-        <p:nvSpPr>
-          <p:cNvPr id="9" name="TextBox 8"/>
-          <p:cNvSpPr txBox="1"/>
-          <p:nvPr/>
-        </p:nvSpPr>
-        <p:spPr>
-          <a:xfrm>
-            <a:off x="10835640" y="6492240"/>
-            <a:ext cx="731520" cy="201168"/>
-          </a:xfrm>
-          <a:prstGeom prst="rect">
-            <a:avLst/>
-          </a:prstGeom>
-          <a:noFill/>
-        </p:spPr>
-        <p:txBody>
-          <a:bodyPr wrap="none" lIns="0" tIns="0" rIns="0" bIns="0" anchor="t">
-            <a:spAutoFit/>
-          </a:bodyPr>
-          <a:lstStyle/>
-          <a:p>
-            <a:pPr algn="r"/>
-            <a:r>
-              <a:rPr sz="850" b="1">
-                <a:solidFill>
-                  <a:srgbClr val="737373"/>
-                </a:solidFill>
-                <a:latin typeface="Aptos"/>
-              </a:rPr>
-              <a:t>W01</a:t>
-            </a:r>
-          </a:p>
-        </p:txBody>
-      </p:sp>
       <p:sp>
         <p:nvSpPr>
           <p:cNvPr id="10" name="Rounded Rectangle 9"/>
@@ -6136,6 +5824,92 @@
 2. Ansatz
 3. Rechnung</a:t>
             </a:r>
+          </a:p>
+        </p:txBody>
+      </p:sp>
+      <p:sp>
+        <p:nvSpPr>
+          <p:cNvPr id="19" name="Datumsplatzhalter 18">
+            <a:extLst>
+              <a:ext uri="{FF2B5EF4-FFF2-40B4-BE49-F238E27FC236}">
+                <a16:creationId xmlns:a16="http://schemas.microsoft.com/office/drawing/2014/main" id="{A42D52E1-1011-2540-D819-26D72311955B}"/>
+              </a:ext>
+            </a:extLst>
+          </p:cNvPr>
+          <p:cNvSpPr>
+            <a:spLocks noGrp="1"/>
+          </p:cNvSpPr>
+          <p:nvPr>
+            <p:ph type="dt" sz="half" idx="10"/>
+          </p:nvPr>
+        </p:nvSpPr>
+        <p:spPr/>
+        <p:txBody>
+          <a:bodyPr/>
+          <a:lstStyle/>
+          <a:p>
+            <a:fld id="{9FF66390-A5DB-4C85-BAE8-E7F62705DCE4}" type="datetime1">
+              <a:rPr lang="de-CH" smtClean="0"/>
+              <a:t>30.09.2026</a:t>
+            </a:fld>
+            <a:endParaRPr lang="en-US"/>
+          </a:p>
+        </p:txBody>
+      </p:sp>
+      <p:sp>
+        <p:nvSpPr>
+          <p:cNvPr id="20" name="Fußzeilenplatzhalter 19">
+            <a:extLst>
+              <a:ext uri="{FF2B5EF4-FFF2-40B4-BE49-F238E27FC236}">
+                <a16:creationId xmlns:a16="http://schemas.microsoft.com/office/drawing/2014/main" id="{33F2923F-ABDB-8D93-100E-27C814AECE99}"/>
+              </a:ext>
+            </a:extLst>
+          </p:cNvPr>
+          <p:cNvSpPr>
+            <a:spLocks noGrp="1"/>
+          </p:cNvSpPr>
+          <p:nvPr>
+            <p:ph type="ftr" sz="quarter" idx="11"/>
+          </p:nvPr>
+        </p:nvSpPr>
+        <p:spPr/>
+        <p:txBody>
+          <a:bodyPr/>
+          <a:lstStyle/>
+          <a:p>
+            <a:r>
+              <a:rPr lang="en-US"/>
+              <a:t>Enrico Putzi WXX</a:t>
+            </a:r>
+          </a:p>
+        </p:txBody>
+      </p:sp>
+      <p:sp>
+        <p:nvSpPr>
+          <p:cNvPr id="21" name="Foliennummernplatzhalter 20">
+            <a:extLst>
+              <a:ext uri="{FF2B5EF4-FFF2-40B4-BE49-F238E27FC236}">
+                <a16:creationId xmlns:a16="http://schemas.microsoft.com/office/drawing/2014/main" id="{B191FEE5-5EB2-039A-5CE6-9480BE1C8C06}"/>
+              </a:ext>
+            </a:extLst>
+          </p:cNvPr>
+          <p:cNvSpPr>
+            <a:spLocks noGrp="1"/>
+          </p:cNvSpPr>
+          <p:nvPr>
+            <p:ph type="sldNum" sz="quarter" idx="12"/>
+          </p:nvPr>
+        </p:nvSpPr>
+        <p:spPr/>
+        <p:txBody>
+          <a:bodyPr/>
+          <a:lstStyle/>
+          <a:p>
+            <a:fld id="{C1FF6DA9-008F-8B48-92A6-B652298478BF}" type="slidenum">
+              <a:rPr lang="en-US" smtClean="0"/>
+              <a:t>5</a:t>
+            </a:fld>
+            <a:endParaRPr lang="en-US"/>
           </a:p>
         </p:txBody>
       </p:sp>
@@ -6358,6 +6132,92 @@
           </a:p>
         </p:txBody>
       </p:sp>
+      <p:sp>
+        <p:nvSpPr>
+          <p:cNvPr id="10" name="Datumsplatzhalter 9">
+            <a:extLst>
+              <a:ext uri="{FF2B5EF4-FFF2-40B4-BE49-F238E27FC236}">
+                <a16:creationId xmlns:a16="http://schemas.microsoft.com/office/drawing/2014/main" id="{ED5334C9-D28A-C6F1-D6D2-0FE51C8BBFB7}"/>
+              </a:ext>
+            </a:extLst>
+          </p:cNvPr>
+          <p:cNvSpPr>
+            <a:spLocks noGrp="1"/>
+          </p:cNvSpPr>
+          <p:nvPr>
+            <p:ph type="dt" sz="half" idx="10"/>
+          </p:nvPr>
+        </p:nvSpPr>
+        <p:spPr/>
+        <p:txBody>
+          <a:bodyPr/>
+          <a:lstStyle/>
+          <a:p>
+            <a:fld id="{B1779357-3FFB-49C6-A63A-1C2EF11BA49D}" type="datetime1">
+              <a:rPr lang="de-CH" smtClean="0"/>
+              <a:t>30.09.2026</a:t>
+            </a:fld>
+            <a:endParaRPr lang="en-US"/>
+          </a:p>
+        </p:txBody>
+      </p:sp>
+      <p:sp>
+        <p:nvSpPr>
+          <p:cNvPr id="11" name="Fußzeilenplatzhalter 10">
+            <a:extLst>
+              <a:ext uri="{FF2B5EF4-FFF2-40B4-BE49-F238E27FC236}">
+                <a16:creationId xmlns:a16="http://schemas.microsoft.com/office/drawing/2014/main" id="{3A87F5C8-12C4-0DF4-5342-4CCD548E33B1}"/>
+              </a:ext>
+            </a:extLst>
+          </p:cNvPr>
+          <p:cNvSpPr>
+            <a:spLocks noGrp="1"/>
+          </p:cNvSpPr>
+          <p:nvPr>
+            <p:ph type="ftr" sz="quarter" idx="11"/>
+          </p:nvPr>
+        </p:nvSpPr>
+        <p:spPr/>
+        <p:txBody>
+          <a:bodyPr/>
+          <a:lstStyle/>
+          <a:p>
+            <a:r>
+              <a:rPr lang="en-US"/>
+              <a:t>Enrico Putzi WXX</a:t>
+            </a:r>
+          </a:p>
+        </p:txBody>
+      </p:sp>
+      <p:sp>
+        <p:nvSpPr>
+          <p:cNvPr id="12" name="Foliennummernplatzhalter 11">
+            <a:extLst>
+              <a:ext uri="{FF2B5EF4-FFF2-40B4-BE49-F238E27FC236}">
+                <a16:creationId xmlns:a16="http://schemas.microsoft.com/office/drawing/2014/main" id="{4C5D481D-CDF3-EB78-7DB6-78DB43777F4D}"/>
+              </a:ext>
+            </a:extLst>
+          </p:cNvPr>
+          <p:cNvSpPr>
+            <a:spLocks noGrp="1"/>
+          </p:cNvSpPr>
+          <p:nvPr>
+            <p:ph type="sldNum" sz="quarter" idx="12"/>
+          </p:nvPr>
+        </p:nvSpPr>
+        <p:spPr/>
+        <p:txBody>
+          <a:bodyPr/>
+          <a:lstStyle/>
+          <a:p>
+            <a:fld id="{C1FF6DA9-008F-8B48-92A6-B652298478BF}" type="slidenum">
+              <a:rPr lang="en-US" smtClean="0"/>
+              <a:t>6</a:t>
+            </a:fld>
+            <a:endParaRPr lang="en-US"/>
+          </a:p>
+        </p:txBody>
+      </p:sp>
     </p:spTree>
   </p:cSld>
   <p:clrMapOvr>
@@ -6372,7 +6232,7 @@
     <p:bg>
       <p:bgPr>
         <a:solidFill>
-          <a:srgbClr val="F7F7F5"/>
+          <a:schemeClr val="bg1"/>
         </a:solidFill>
         <a:effectLst/>
       </p:bgPr>
@@ -6542,146 +6402,6 @@
           </a:p>
         </p:txBody>
       </p:sp>
-      <p:cxnSp>
-        <p:nvCxnSpPr>
-          <p:cNvPr id="6" name="Connector 5"/>
-          <p:cNvCxnSpPr/>
-          <p:nvPr/>
-        </p:nvCxnSpPr>
-        <p:spPr>
-          <a:xfrm>
-            <a:off x="594360" y="6446520"/>
-            <a:ext cx="10972800" cy="0"/>
-          </a:xfrm>
-          <a:prstGeom prst="line">
-            <a:avLst/>
-          </a:prstGeom>
-          <a:ln w="12700">
-            <a:solidFill>
-              <a:srgbClr val="E8E8E5"/>
-            </a:solidFill>
-          </a:ln>
-        </p:spPr>
-        <p:style>
-          <a:lnRef idx="2">
-            <a:schemeClr val="accent1"/>
-          </a:lnRef>
-          <a:fillRef idx="0">
-            <a:schemeClr val="accent1"/>
-          </a:fillRef>
-          <a:effectRef idx="1">
-            <a:schemeClr val="accent1"/>
-          </a:effectRef>
-          <a:fontRef idx="minor">
-            <a:schemeClr val="tx1"/>
-          </a:fontRef>
-        </p:style>
-      </p:cxnSp>
-      <p:sp>
-        <p:nvSpPr>
-          <p:cNvPr id="7" name="TextBox 6"/>
-          <p:cNvSpPr txBox="1"/>
-          <p:nvPr/>
-        </p:nvSpPr>
-        <p:spPr>
-          <a:xfrm>
-            <a:off x="594360" y="6492240"/>
-            <a:ext cx="1554480" cy="201168"/>
-          </a:xfrm>
-          <a:prstGeom prst="rect">
-            <a:avLst/>
-          </a:prstGeom>
-          <a:noFill/>
-        </p:spPr>
-        <p:txBody>
-          <a:bodyPr wrap="none" lIns="0" tIns="0" rIns="0" bIns="0" anchor="t">
-            <a:spAutoFit/>
-          </a:bodyPr>
-          <a:lstStyle/>
-          <a:p>
-            <a:pPr algn="l"/>
-            <a:r>
-              <a:rPr sz="850" b="1">
-                <a:solidFill>
-                  <a:srgbClr val="737373"/>
-                </a:solidFill>
-                <a:latin typeface="Aptos"/>
-              </a:rPr>
-              <a:t>NUS1 · ÜBUNG</a:t>
-            </a:r>
-          </a:p>
-        </p:txBody>
-      </p:sp>
-      <p:sp>
-        <p:nvSpPr>
-          <p:cNvPr id="8" name="TextBox 7"/>
-          <p:cNvSpPr txBox="1"/>
-          <p:nvPr/>
-        </p:nvSpPr>
-        <p:spPr>
-          <a:xfrm>
-            <a:off x="10074076" y="6492240"/>
-            <a:ext cx="578684" cy="130805"/>
-          </a:xfrm>
-          <a:prstGeom prst="rect">
-            <a:avLst/>
-          </a:prstGeom>
-          <a:noFill/>
-        </p:spPr>
-        <p:txBody>
-          <a:bodyPr wrap="none" lIns="0" tIns="0" rIns="0" bIns="0" anchor="t">
-            <a:spAutoFit/>
-          </a:bodyPr>
-          <a:lstStyle/>
-          <a:p>
-            <a:pPr algn="r"/>
-            <a:r>
-              <a:rPr sz="850" b="0" dirty="0">
-                <a:solidFill>
-                  <a:srgbClr val="737373"/>
-                </a:solidFill>
-                <a:latin typeface="Aptos"/>
-              </a:rPr>
-              <a:t>Enrico Putzi </a:t>
-            </a:r>
-          </a:p>
-        </p:txBody>
-      </p:sp>
-      <p:sp>
-        <p:nvSpPr>
-          <p:cNvPr id="9" name="TextBox 8"/>
-          <p:cNvSpPr txBox="1"/>
-          <p:nvPr/>
-        </p:nvSpPr>
-        <p:spPr>
-          <a:xfrm>
-            <a:off x="10835640" y="6492240"/>
-            <a:ext cx="731520" cy="201168"/>
-          </a:xfrm>
-          <a:prstGeom prst="rect">
-            <a:avLst/>
-          </a:prstGeom>
-          <a:noFill/>
-        </p:spPr>
-        <p:txBody>
-          <a:bodyPr wrap="none" lIns="0" tIns="0" rIns="0" bIns="0" anchor="t">
-            <a:spAutoFit/>
-          </a:bodyPr>
-          <a:lstStyle/>
-          <a:p>
-            <a:pPr algn="r"/>
-            <a:r>
-              <a:rPr sz="850" b="1">
-                <a:solidFill>
-                  <a:srgbClr val="737373"/>
-                </a:solidFill>
-                <a:latin typeface="Aptos"/>
-              </a:rPr>
-              <a:t>W01</a:t>
-            </a:r>
-          </a:p>
-        </p:txBody>
-      </p:sp>
       <p:sp>
         <p:nvSpPr>
           <p:cNvPr id="10" name="Rounded Rectangle 9"/>
@@ -7100,6 +6820,92 @@
           </a:p>
         </p:txBody>
       </p:sp>
+      <p:sp>
+        <p:nvSpPr>
+          <p:cNvPr id="24" name="Datumsplatzhalter 23">
+            <a:extLst>
+              <a:ext uri="{FF2B5EF4-FFF2-40B4-BE49-F238E27FC236}">
+                <a16:creationId xmlns:a16="http://schemas.microsoft.com/office/drawing/2014/main" id="{2EA94921-0C4B-A8A0-74D0-1080596E2268}"/>
+              </a:ext>
+            </a:extLst>
+          </p:cNvPr>
+          <p:cNvSpPr>
+            <a:spLocks noGrp="1"/>
+          </p:cNvSpPr>
+          <p:nvPr>
+            <p:ph type="dt" sz="half" idx="10"/>
+          </p:nvPr>
+        </p:nvSpPr>
+        <p:spPr/>
+        <p:txBody>
+          <a:bodyPr/>
+          <a:lstStyle/>
+          <a:p>
+            <a:fld id="{EB8E9A6E-507F-46C1-9F12-1A6D72FBF908}" type="datetime1">
+              <a:rPr lang="de-CH" smtClean="0"/>
+              <a:t>30.09.2026</a:t>
+            </a:fld>
+            <a:endParaRPr lang="en-US" dirty="0"/>
+          </a:p>
+        </p:txBody>
+      </p:sp>
+      <p:sp>
+        <p:nvSpPr>
+          <p:cNvPr id="25" name="Fußzeilenplatzhalter 24">
+            <a:extLst>
+              <a:ext uri="{FF2B5EF4-FFF2-40B4-BE49-F238E27FC236}">
+                <a16:creationId xmlns:a16="http://schemas.microsoft.com/office/drawing/2014/main" id="{9438F619-6A04-AD9B-6C65-51AEB489A950}"/>
+              </a:ext>
+            </a:extLst>
+          </p:cNvPr>
+          <p:cNvSpPr>
+            <a:spLocks noGrp="1"/>
+          </p:cNvSpPr>
+          <p:nvPr>
+            <p:ph type="ftr" sz="quarter" idx="11"/>
+          </p:nvPr>
+        </p:nvSpPr>
+        <p:spPr/>
+        <p:txBody>
+          <a:bodyPr/>
+          <a:lstStyle/>
+          <a:p>
+            <a:r>
+              <a:rPr lang="en-US"/>
+              <a:t>Enrico Putzi WXX</a:t>
+            </a:r>
+          </a:p>
+        </p:txBody>
+      </p:sp>
+      <p:sp>
+        <p:nvSpPr>
+          <p:cNvPr id="26" name="Foliennummernplatzhalter 25">
+            <a:extLst>
+              <a:ext uri="{FF2B5EF4-FFF2-40B4-BE49-F238E27FC236}">
+                <a16:creationId xmlns:a16="http://schemas.microsoft.com/office/drawing/2014/main" id="{6A495C1E-4949-515F-CE44-BD0B40A25FEC}"/>
+              </a:ext>
+            </a:extLst>
+          </p:cNvPr>
+          <p:cNvSpPr>
+            <a:spLocks noGrp="1"/>
+          </p:cNvSpPr>
+          <p:nvPr>
+            <p:ph type="sldNum" sz="quarter" idx="12"/>
+          </p:nvPr>
+        </p:nvSpPr>
+        <p:spPr/>
+        <p:txBody>
+          <a:bodyPr/>
+          <a:lstStyle/>
+          <a:p>
+            <a:fld id="{C1FF6DA9-008F-8B48-92A6-B652298478BF}" type="slidenum">
+              <a:rPr lang="en-US" smtClean="0"/>
+              <a:t>7</a:t>
+            </a:fld>
+            <a:endParaRPr lang="en-US"/>
+          </a:p>
+        </p:txBody>
+      </p:sp>
     </p:spTree>
   </p:cSld>
   <p:clrMapOvr>
@@ -7114,7 +6920,7 @@
     <p:bg>
       <p:bgPr>
         <a:solidFill>
-          <a:srgbClr val="EEEEEA"/>
+          <a:schemeClr val="bg1"/>
         </a:solidFill>
         <a:effectLst/>
       </p:bgPr>
@@ -7554,6 +7360,92 @@
               </a:rPr>
               <a:t>Die Folien sollen vorbereiten — nicht die ganze Übung für dich sprechen.</a:t>
             </a:r>
+          </a:p>
+        </p:txBody>
+      </p:sp>
+      <p:sp>
+        <p:nvSpPr>
+          <p:cNvPr id="16" name="Datumsplatzhalter 15">
+            <a:extLst>
+              <a:ext uri="{FF2B5EF4-FFF2-40B4-BE49-F238E27FC236}">
+                <a16:creationId xmlns:a16="http://schemas.microsoft.com/office/drawing/2014/main" id="{DF40432C-B765-AE30-8DA2-ED9DECC71A08}"/>
+              </a:ext>
+            </a:extLst>
+          </p:cNvPr>
+          <p:cNvSpPr>
+            <a:spLocks noGrp="1"/>
+          </p:cNvSpPr>
+          <p:nvPr>
+            <p:ph type="dt" sz="half" idx="10"/>
+          </p:nvPr>
+        </p:nvSpPr>
+        <p:spPr/>
+        <p:txBody>
+          <a:bodyPr/>
+          <a:lstStyle/>
+          <a:p>
+            <a:fld id="{BF35E6A0-0035-4040-A49C-78472C87DEA5}" type="datetime1">
+              <a:rPr lang="de-CH" smtClean="0"/>
+              <a:t>30.09.2026</a:t>
+            </a:fld>
+            <a:endParaRPr lang="en-US"/>
+          </a:p>
+        </p:txBody>
+      </p:sp>
+      <p:sp>
+        <p:nvSpPr>
+          <p:cNvPr id="17" name="Fußzeilenplatzhalter 16">
+            <a:extLst>
+              <a:ext uri="{FF2B5EF4-FFF2-40B4-BE49-F238E27FC236}">
+                <a16:creationId xmlns:a16="http://schemas.microsoft.com/office/drawing/2014/main" id="{89823400-78F4-A33F-85CB-655A729C3DDE}"/>
+              </a:ext>
+            </a:extLst>
+          </p:cNvPr>
+          <p:cNvSpPr>
+            <a:spLocks noGrp="1"/>
+          </p:cNvSpPr>
+          <p:nvPr>
+            <p:ph type="ftr" sz="quarter" idx="11"/>
+          </p:nvPr>
+        </p:nvSpPr>
+        <p:spPr/>
+        <p:txBody>
+          <a:bodyPr/>
+          <a:lstStyle/>
+          <a:p>
+            <a:r>
+              <a:rPr lang="en-US"/>
+              <a:t>Enrico Putzi WXX</a:t>
+            </a:r>
+          </a:p>
+        </p:txBody>
+      </p:sp>
+      <p:sp>
+        <p:nvSpPr>
+          <p:cNvPr id="18" name="Foliennummernplatzhalter 17">
+            <a:extLst>
+              <a:ext uri="{FF2B5EF4-FFF2-40B4-BE49-F238E27FC236}">
+                <a16:creationId xmlns:a16="http://schemas.microsoft.com/office/drawing/2014/main" id="{BF2FD881-A8F9-D314-61EF-85B3AFB9E1B7}"/>
+              </a:ext>
+            </a:extLst>
+          </p:cNvPr>
+          <p:cNvSpPr>
+            <a:spLocks noGrp="1"/>
+          </p:cNvSpPr>
+          <p:nvPr>
+            <p:ph type="sldNum" sz="quarter" idx="12"/>
+          </p:nvPr>
+        </p:nvSpPr>
+        <p:spPr/>
+        <p:txBody>
+          <a:bodyPr/>
+          <a:lstStyle/>
+          <a:p>
+            <a:fld id="{C1FF6DA9-008F-8B48-92A6-B652298478BF}" type="slidenum">
+              <a:rPr lang="en-US" smtClean="0"/>
+              <a:t>8</a:t>
+            </a:fld>
+            <a:endParaRPr lang="en-US"/>
           </a:p>
         </p:txBody>
       </p:sp>

--- a/courses/nus1/files/slides/template.pptx
+++ b/courses/nus1/files/slides/template.pptx
@@ -5,7 +5,7 @@
     <p:sldMasterId id="2147483648" r:id="rId1"/>
   </p:sldMasterIdLst>
   <p:notesMasterIdLst>
-    <p:notesMasterId r:id="rId10"/>
+    <p:notesMasterId r:id="rId9"/>
   </p:notesMasterIdLst>
   <p:sldIdLst>
     <p:sldId id="256" r:id="rId2"/>
@@ -15,7 +15,6 @@
     <p:sldId id="260" r:id="rId6"/>
     <p:sldId id="261" r:id="rId7"/>
     <p:sldId id="262" r:id="rId8"/>
-    <p:sldId id="263" r:id="rId9"/>
   </p:sldIdLst>
   <p:sldSz cx="12192000" cy="6858000"/>
   <p:notesSz cx="6858000" cy="9144000"/>
@@ -748,76 +747,6 @@
 </p:notes>
 </file>
 
-<file path=ppt/notesSlides/notesSlide8.xml><?xml version="1.0" encoding="utf-8"?>
-<p:notes xmlns:a="http://schemas.openxmlformats.org/drawingml/2006/main" xmlns:r="http://schemas.openxmlformats.org/officeDocument/2006/relationships" xmlns:p="http://schemas.openxmlformats.org/presentationml/2006/main">
-  <p:cSld>
-    <p:spTree>
-      <p:nvGrpSpPr>
-        <p:cNvPr id="1" name=""/>
-        <p:cNvGrpSpPr/>
-        <p:nvPr/>
-      </p:nvGrpSpPr>
-      <p:grpSpPr>
-        <a:xfrm>
-          <a:off x="0" y="0"/>
-          <a:ext cx="0" cy="0"/>
-          <a:chOff x="0" y="0"/>
-          <a:chExt cx="0" cy="0"/>
-        </a:xfrm>
-      </p:grpSpPr>
-      <p:sp>
-        <p:nvSpPr>
-          <p:cNvPr id="2" name="Slide Image Placeholder 1"/>
-          <p:cNvSpPr>
-            <a:spLocks noGrp="1" noRot="1" noChangeAspect="1"/>
-          </p:cNvSpPr>
-          <p:nvPr>
-            <p:ph type="sldImg" idx="2"/>
-          </p:nvPr>
-        </p:nvSpPr>
-        <p:spPr/>
-      </p:sp>
-      <p:sp>
-        <p:nvSpPr>
-          <p:cNvPr id="3" name="Notes Placeholder 2"/>
-          <p:cNvSpPr>
-            <a:spLocks noGrp="1"/>
-          </p:cNvSpPr>
-          <p:nvPr>
-            <p:ph type="body" sz="quarter" idx="3"/>
-          </p:nvPr>
-        </p:nvSpPr>
-        <p:spPr/>
-        <p:txBody>
-          <a:bodyPr/>
-          <a:lstStyle/>
-          <a:p>
-            <a:r>
-              <a:t>Interne Stilfolie. Vor dem Präsentieren löschen.</a:t>
-            </a:r>
-          </a:p>
-        </p:txBody>
-      </p:sp>
-      <p:sp>
-        <p:nvSpPr>
-          <p:cNvPr id="4" name="Slide Number Placeholder 3"/>
-          <p:cNvSpPr>
-            <a:spLocks noGrp="1"/>
-          </p:cNvSpPr>
-          <p:nvPr>
-            <p:ph type="sldNum" sz="quarter" idx="5"/>
-          </p:nvPr>
-        </p:nvSpPr>
-        <p:spPr/>
-      </p:sp>
-    </p:spTree>
-  </p:cSld>
-  <p:clrMapOvr>
-    <a:masterClrMapping/>
-  </p:clrMapOvr>
-</p:notes>
-</file>
-
 <file path=ppt/slideLayouts/slideLayout1.xml><?xml version="1.0" encoding="utf-8"?>
 <p:sldLayout xmlns:a="http://schemas.openxmlformats.org/drawingml/2006/main" xmlns:r="http://schemas.openxmlformats.org/officeDocument/2006/relationships" xmlns:p="http://schemas.openxmlformats.org/presentationml/2006/main" type="title" preserve="1">
   <p:cSld name="Title Slide">
@@ -997,7 +926,7 @@
           <a:p>
             <a:fld id="{1841982D-82A2-4E03-A07D-65CA8B5F8742}" type="datetime1">
               <a:rPr lang="de-CH" smtClean="0"/>
-              <a:t>30.09.2026</a:t>
+              <a:t>14.10.2026</a:t>
             </a:fld>
             <a:endParaRPr lang="en-US"/>
           </a:p>
@@ -1168,7 +1097,7 @@
           <a:p>
             <a:fld id="{E537C623-2BE6-40DF-A481-1E3E5DAF3BB1}" type="datetime1">
               <a:rPr lang="de-CH" smtClean="0"/>
-              <a:t>30.09.2026</a:t>
+              <a:t>14.10.2026</a:t>
             </a:fld>
             <a:endParaRPr lang="en-US"/>
           </a:p>
@@ -1349,7 +1278,7 @@
           <a:p>
             <a:fld id="{2387D4E0-9B7E-4417-AEAD-59A9C21D2514}" type="datetime1">
               <a:rPr lang="de-CH" smtClean="0"/>
-              <a:t>30.09.2026</a:t>
+              <a:t>14.10.2026</a:t>
             </a:fld>
             <a:endParaRPr lang="en-US"/>
           </a:p>
@@ -1520,7 +1449,7 @@
           <a:p>
             <a:fld id="{CA814FE1-0FA3-48D7-8958-994BF4919AE6}" type="datetime1">
               <a:rPr lang="de-CH" smtClean="0"/>
-              <a:t>30.09.2026</a:t>
+              <a:t>14.10.2026</a:t>
             </a:fld>
             <a:endParaRPr lang="en-US"/>
           </a:p>
@@ -1768,7 +1697,7 @@
           <a:p>
             <a:fld id="{C893AEC3-33C5-4096-928C-E105753C3DA5}" type="datetime1">
               <a:rPr lang="de-CH" smtClean="0"/>
-              <a:t>30.09.2026</a:t>
+              <a:t>14.10.2026</a:t>
             </a:fld>
             <a:endParaRPr lang="en-US"/>
           </a:p>
@@ -2056,7 +1985,7 @@
           <a:p>
             <a:fld id="{6067A475-4367-4D6E-AD87-3B1FF46691DF}" type="datetime1">
               <a:rPr lang="de-CH" smtClean="0"/>
-              <a:t>30.09.2026</a:t>
+              <a:t>14.10.2026</a:t>
             </a:fld>
             <a:endParaRPr lang="en-US"/>
           </a:p>
@@ -2478,7 +2407,7 @@
           <a:p>
             <a:fld id="{B5B81D07-040C-403D-A621-294731A1A73C}" type="datetime1">
               <a:rPr lang="de-CH" smtClean="0"/>
-              <a:t>30.09.2026</a:t>
+              <a:t>14.10.2026</a:t>
             </a:fld>
             <a:endParaRPr lang="en-US"/>
           </a:p>
@@ -2598,7 +2527,7 @@
           <a:p>
             <a:fld id="{7A084239-FBF7-458E-B3A9-617203C3EFDE}" type="datetime1">
               <a:rPr lang="de-CH" smtClean="0"/>
-              <a:t>30.09.2026</a:t>
+              <a:t>14.10.2026</a:t>
             </a:fld>
             <a:endParaRPr lang="en-US"/>
           </a:p>
@@ -2696,7 +2625,7 @@
           <a:p>
             <a:fld id="{EA470B40-5609-4D0C-9667-2862A3AF6E35}" type="datetime1">
               <a:rPr lang="de-CH" smtClean="0"/>
-              <a:t>30.09.2026</a:t>
+              <a:t>14.10.2026</a:t>
             </a:fld>
             <a:endParaRPr lang="en-US"/>
           </a:p>
@@ -2974,7 +2903,7 @@
           <a:p>
             <a:fld id="{6432A5C9-989E-4915-90A3-748149489DA8}" type="datetime1">
               <a:rPr lang="de-CH" smtClean="0"/>
-              <a:t>30.09.2026</a:t>
+              <a:t>14.10.2026</a:t>
             </a:fld>
             <a:endParaRPr lang="en-US"/>
           </a:p>
@@ -3229,7 +3158,7 @@
           <a:p>
             <a:fld id="{DE5FC3CA-46A9-4BDD-9F7F-F76319CF56C8}" type="datetime1">
               <a:rPr lang="de-CH" smtClean="0"/>
-              <a:t>30.09.2026</a:t>
+              <a:t>14.10.2026</a:t>
             </a:fld>
             <a:endParaRPr lang="en-US"/>
           </a:p>
@@ -3443,7 +3372,7 @@
           <a:p>
             <a:fld id="{1DF76107-2327-4742-820B-1886FFEE5E55}" type="datetime1">
               <a:rPr lang="de-CH" smtClean="0"/>
-              <a:t>30.09.2026</a:t>
+              <a:t>14.10.2026</a:t>
             </a:fld>
             <a:endParaRPr lang="en-US"/>
           </a:p>
@@ -4506,7 +4435,7 @@
         <p:spPr>
           <a:xfrm>
             <a:off x="914400" y="2761488"/>
-            <a:ext cx="3931920" cy="2286000"/>
+            <a:ext cx="2648225" cy="923330"/>
           </a:xfrm>
           <a:prstGeom prst="rect">
             <a:avLst/>
@@ -4519,16 +4448,10 @@
           </a:bodyPr>
           <a:lstStyle/>
           <a:p>
-            <a:pPr algn="l"/>
-            <a:r>
-              <a:rPr sz="2000" b="0" dirty="0">
-                <a:solidFill>
-                  <a:srgbClr val="171717"/>
-                </a:solidFill>
-                <a:latin typeface="Aptos"/>
-              </a:rPr>
-              <a:t>• </a:t>
-            </a:r>
+            <a:pPr marL="342900" indent="-342900" algn="l">
+              <a:buFont typeface="Arial" panose="020B0604020202020204" pitchFamily="34" charset="0"/>
+              <a:buChar char="•"/>
+            </a:pPr>
             <a:r>
               <a:rPr sz="2000" b="0" dirty="0" err="1">
                 <a:solidFill>
@@ -4564,7 +4487,7 @@
                 <a:latin typeface="Aptos"/>
               </a:rPr>
               <a:t>
-• </a:t>
+ </a:t>
             </a:r>
             <a:r>
               <a:rPr sz="2000" b="0" dirty="0" err="1">
@@ -4601,7 +4524,7 @@
                 <a:latin typeface="Aptos"/>
               </a:rPr>
               <a:t>
-• </a:t>
+</a:t>
             </a:r>
             <a:r>
               <a:rPr sz="2000" b="0" dirty="0" err="1">
@@ -4662,7 +4585,7 @@
           <a:p>
             <a:fld id="{77A2E3E8-6F8A-4A2D-87B8-002A9DB830F0}" type="datetime1">
               <a:rPr lang="de-CH" smtClean="0"/>
-              <a:t>30.09.2026</a:t>
+              <a:t>14.10.2026</a:t>
             </a:fld>
             <a:endParaRPr lang="en-US"/>
           </a:p>
@@ -4967,7 +4890,7 @@
           <a:p>
             <a:fld id="{497E40BA-CE70-4E4C-B484-B26569D677F9}" type="datetime1">
               <a:rPr lang="de-CH" smtClean="0"/>
-              <a:t>30.09.2026</a:t>
+              <a:t>14.10.2026</a:t>
             </a:fld>
             <a:endParaRPr lang="en-US"/>
           </a:p>
@@ -5343,7 +5266,7 @@
           <a:p>
             <a:fld id="{182A7AC6-7431-48B9-BAC6-F1C873F640C5}" type="datetime1">
               <a:rPr lang="de-CH" smtClean="0"/>
-              <a:t>30.09.2026</a:t>
+              <a:t>14.10.2026</a:t>
             </a:fld>
             <a:endParaRPr lang="en-US" dirty="0"/>
           </a:p>
@@ -5850,7 +5773,7 @@
           <a:p>
             <a:fld id="{9FF66390-A5DB-4C85-BAE8-E7F62705DCE4}" type="datetime1">
               <a:rPr lang="de-CH" smtClean="0"/>
-              <a:t>30.09.2026</a:t>
+              <a:t>14.10.2026</a:t>
             </a:fld>
             <a:endParaRPr lang="en-US"/>
           </a:p>
@@ -6155,7 +6078,7 @@
           <a:p>
             <a:fld id="{B1779357-3FFB-49C6-A63A-1C2EF11BA49D}" type="datetime1">
               <a:rPr lang="de-CH" smtClean="0"/>
-              <a:t>30.09.2026</a:t>
+              <a:t>14.10.2026</a:t>
             </a:fld>
             <a:endParaRPr lang="en-US"/>
           </a:p>
@@ -6843,7 +6766,7 @@
           <a:p>
             <a:fld id="{EB8E9A6E-507F-46C1-9F12-1A6D72FBF908}" type="datetime1">
               <a:rPr lang="de-CH" smtClean="0"/>
-              <a:t>30.09.2026</a:t>
+              <a:t>14.10.2026</a:t>
             </a:fld>
             <a:endParaRPr lang="en-US" dirty="0"/>
           </a:p>
@@ -6901,549 +6824,6 @@
             <a:fld id="{C1FF6DA9-008F-8B48-92A6-B652298478BF}" type="slidenum">
               <a:rPr lang="en-US" smtClean="0"/>
               <a:t>7</a:t>
-            </a:fld>
-            <a:endParaRPr lang="en-US"/>
-          </a:p>
-        </p:txBody>
-      </p:sp>
-    </p:spTree>
-  </p:cSld>
-  <p:clrMapOvr>
-    <a:masterClrMapping/>
-  </p:clrMapOvr>
-</p:sld>
-</file>
-
-<file path=ppt/slides/slide8.xml><?xml version="1.0" encoding="utf-8"?>
-<p:sld xmlns:a="http://schemas.openxmlformats.org/drawingml/2006/main" xmlns:r="http://schemas.openxmlformats.org/officeDocument/2006/relationships" xmlns:p="http://schemas.openxmlformats.org/presentationml/2006/main">
-  <p:cSld>
-    <p:bg>
-      <p:bgPr>
-        <a:solidFill>
-          <a:schemeClr val="bg1"/>
-        </a:solidFill>
-        <a:effectLst/>
-      </p:bgPr>
-    </p:bg>
-    <p:spTree>
-      <p:nvGrpSpPr>
-        <p:cNvPr id="1" name=""/>
-        <p:cNvGrpSpPr/>
-        <p:nvPr/>
-      </p:nvGrpSpPr>
-      <p:grpSpPr>
-        <a:xfrm>
-          <a:off x="0" y="0"/>
-          <a:ext cx="0" cy="0"/>
-          <a:chOff x="0" y="0"/>
-          <a:chExt cx="0" cy="0"/>
-        </a:xfrm>
-      </p:grpSpPr>
-      <p:sp>
-        <p:nvSpPr>
-          <p:cNvPr id="2" name="Rounded Rectangle 1"/>
-          <p:cNvSpPr/>
-          <p:nvPr/>
-        </p:nvSpPr>
-        <p:spPr>
-          <a:xfrm>
-            <a:off x="594360" y="502920"/>
-            <a:ext cx="1828800" cy="292608"/>
-          </a:xfrm>
-          <a:prstGeom prst="roundRect">
-            <a:avLst/>
-          </a:prstGeom>
-          <a:solidFill>
-            <a:srgbClr val="171717"/>
-          </a:solidFill>
-          <a:ln w="10160">
-            <a:solidFill>
-              <a:srgbClr val="171717"/>
-            </a:solidFill>
-          </a:ln>
-        </p:spPr>
-        <p:style>
-          <a:lnRef idx="1">
-            <a:schemeClr val="accent1"/>
-          </a:lnRef>
-          <a:fillRef idx="3">
-            <a:schemeClr val="accent1"/>
-          </a:fillRef>
-          <a:effectRef idx="2">
-            <a:schemeClr val="accent1"/>
-          </a:effectRef>
-          <a:fontRef idx="minor">
-            <a:schemeClr val="lt1"/>
-          </a:fontRef>
-        </p:style>
-        <p:txBody>
-          <a:bodyPr rtlCol="0" anchor="ctr"/>
-          <a:lstStyle/>
-          <a:p>
-            <a:pPr algn="ctr"/>
-            <a:endParaRPr/>
-          </a:p>
-        </p:txBody>
-      </p:sp>
-      <p:sp>
-        <p:nvSpPr>
-          <p:cNvPr id="3" name="TextBox 2"/>
-          <p:cNvSpPr txBox="1"/>
-          <p:nvPr/>
-        </p:nvSpPr>
-        <p:spPr>
-          <a:xfrm>
-            <a:off x="594360" y="512064"/>
-            <a:ext cx="1828800" cy="246888"/>
-          </a:xfrm>
-          <a:prstGeom prst="rect">
-            <a:avLst/>
-          </a:prstGeom>
-          <a:noFill/>
-        </p:spPr>
-        <p:txBody>
-          <a:bodyPr wrap="none" lIns="0" tIns="0" rIns="0" bIns="0" anchor="ctr">
-            <a:spAutoFit/>
-          </a:bodyPr>
-          <a:lstStyle/>
-          <a:p>
-            <a:pPr algn="ctr"/>
-            <a:r>
-              <a:rPr sz="850" b="1">
-                <a:solidFill>
-                  <a:srgbClr val="FFFFFF"/>
-                </a:solidFill>
-                <a:latin typeface="Aptos"/>
-              </a:rPr>
-              <a:t>MASTER · NICHT PRÄSENTIEREN</a:t>
-            </a:r>
-          </a:p>
-        </p:txBody>
-      </p:sp>
-      <p:sp>
-        <p:nvSpPr>
-          <p:cNvPr id="4" name="TextBox 3"/>
-          <p:cNvSpPr txBox="1"/>
-          <p:nvPr/>
-        </p:nvSpPr>
-        <p:spPr>
-          <a:xfrm>
-            <a:off x="594360" y="1078992"/>
-            <a:ext cx="6400800" cy="594360"/>
-          </a:xfrm>
-          <a:prstGeom prst="rect">
-            <a:avLst/>
-          </a:prstGeom>
-          <a:noFill/>
-        </p:spPr>
-        <p:txBody>
-          <a:bodyPr wrap="none" lIns="0" tIns="0" rIns="0" bIns="0" anchor="t">
-            <a:spAutoFit/>
-          </a:bodyPr>
-          <a:lstStyle/>
-          <a:p>
-            <a:pPr algn="l"/>
-            <a:r>
-              <a:rPr sz="3100" b="1">
-                <a:solidFill>
-                  <a:srgbClr val="171717"/>
-                </a:solidFill>
-                <a:latin typeface="Aptos"/>
-              </a:rPr>
-              <a:t>Dein Standard</a:t>
-            </a:r>
-          </a:p>
-        </p:txBody>
-      </p:sp>
-      <p:sp>
-        <p:nvSpPr>
-          <p:cNvPr id="5" name="TextBox 4"/>
-          <p:cNvSpPr txBox="1"/>
-          <p:nvPr/>
-        </p:nvSpPr>
-        <p:spPr>
-          <a:xfrm>
-            <a:off x="621792" y="1737360"/>
-            <a:ext cx="8046720" cy="365760"/>
-          </a:xfrm>
-          <a:prstGeom prst="rect">
-            <a:avLst/>
-          </a:prstGeom>
-          <a:noFill/>
-        </p:spPr>
-        <p:txBody>
-          <a:bodyPr wrap="none" lIns="0" tIns="0" rIns="0" bIns="0" anchor="t">
-            <a:spAutoFit/>
-          </a:bodyPr>
-          <a:lstStyle/>
-          <a:p>
-            <a:pPr algn="l"/>
-            <a:r>
-              <a:rPr sz="1350" b="0">
-                <a:solidFill>
-                  <a:srgbClr val="737373"/>
-                </a:solidFill>
-                <a:latin typeface="Aptos"/>
-              </a:rPr>
-              <a:t>Nicht jede Folie neu erfinden. 80 % der Zeit nur Inhalte ersetzen.</a:t>
-            </a:r>
-          </a:p>
-        </p:txBody>
-      </p:sp>
-      <p:sp>
-        <p:nvSpPr>
-          <p:cNvPr id="6" name="Rounded Rectangle 5"/>
-          <p:cNvSpPr/>
-          <p:nvPr/>
-        </p:nvSpPr>
-        <p:spPr>
-          <a:xfrm>
-            <a:off x="621792" y="2395728"/>
-            <a:ext cx="5349240" cy="2331720"/>
-          </a:xfrm>
-          <a:prstGeom prst="roundRect">
-            <a:avLst/>
-          </a:prstGeom>
-          <a:solidFill>
-            <a:srgbClr val="FFFFFF"/>
-          </a:solidFill>
-          <a:ln w="10160">
-            <a:solidFill>
-              <a:srgbClr val="E8E8E5"/>
-            </a:solidFill>
-          </a:ln>
-        </p:spPr>
-        <p:style>
-          <a:lnRef idx="1">
-            <a:schemeClr val="accent1"/>
-          </a:lnRef>
-          <a:fillRef idx="3">
-            <a:schemeClr val="accent1"/>
-          </a:fillRef>
-          <a:effectRef idx="2">
-            <a:schemeClr val="accent1"/>
-          </a:effectRef>
-          <a:fontRef idx="minor">
-            <a:schemeClr val="lt1"/>
-          </a:fontRef>
-        </p:style>
-        <p:txBody>
-          <a:bodyPr rtlCol="0" anchor="ctr"/>
-          <a:lstStyle/>
-          <a:p>
-            <a:pPr algn="ctr"/>
-            <a:endParaRPr/>
-          </a:p>
-        </p:txBody>
-      </p:sp>
-      <p:sp>
-        <p:nvSpPr>
-          <p:cNvPr id="7" name="TextBox 6"/>
-          <p:cNvSpPr txBox="1"/>
-          <p:nvPr/>
-        </p:nvSpPr>
-        <p:spPr>
-          <a:xfrm>
-            <a:off x="896112" y="2679192"/>
-            <a:ext cx="914400" cy="320040"/>
-          </a:xfrm>
-          <a:prstGeom prst="rect">
-            <a:avLst/>
-          </a:prstGeom>
-          <a:noFill/>
-        </p:spPr>
-        <p:txBody>
-          <a:bodyPr wrap="none" lIns="0" tIns="0" rIns="0" bIns="0" anchor="t">
-            <a:spAutoFit/>
-          </a:bodyPr>
-          <a:lstStyle/>
-          <a:p>
-            <a:pPr algn="l"/>
-            <a:r>
-              <a:rPr sz="1500" b="1">
-                <a:solidFill>
-                  <a:srgbClr val="171717"/>
-                </a:solidFill>
-                <a:latin typeface="Aptos"/>
-              </a:rPr>
-              <a:t>Regel</a:t>
-            </a:r>
-          </a:p>
-        </p:txBody>
-      </p:sp>
-      <p:sp>
-        <p:nvSpPr>
-          <p:cNvPr id="8" name="TextBox 7"/>
-          <p:cNvSpPr txBox="1"/>
-          <p:nvPr/>
-        </p:nvSpPr>
-        <p:spPr>
-          <a:xfrm>
-            <a:off x="896112" y="3154680"/>
-            <a:ext cx="4526280" cy="1234440"/>
-          </a:xfrm>
-          <a:prstGeom prst="rect">
-            <a:avLst/>
-          </a:prstGeom>
-          <a:noFill/>
-        </p:spPr>
-        <p:txBody>
-          <a:bodyPr wrap="none" lIns="0" tIns="0" rIns="0" bIns="0" anchor="t">
-            <a:spAutoFit/>
-          </a:bodyPr>
-          <a:lstStyle/>
-          <a:p>
-            <a:pPr algn="l"/>
-            <a:r>
-              <a:rPr sz="1400" b="0">
-                <a:solidFill>
-                  <a:srgbClr val="171717"/>
-                </a:solidFill>
-                <a:latin typeface="Aptos"/>
-              </a:rPr>
-              <a:t>1. Eine klare Struktur
-2. Links Text, rechts Visual
-3. Grosse Schaltungen / Fotos
-4. Wenig Text
-5. GoodNotes = live erklären</a:t>
-            </a:r>
-          </a:p>
-        </p:txBody>
-      </p:sp>
-      <p:sp>
-        <p:nvSpPr>
-          <p:cNvPr id="9" name="Rounded Rectangle 8"/>
-          <p:cNvSpPr/>
-          <p:nvPr/>
-        </p:nvSpPr>
-        <p:spPr>
-          <a:xfrm>
-            <a:off x="6144768" y="2395728"/>
-            <a:ext cx="5422392" cy="2331720"/>
-          </a:xfrm>
-          <a:prstGeom prst="roundRect">
-            <a:avLst/>
-          </a:prstGeom>
-          <a:solidFill>
-            <a:srgbClr val="FFFFFF"/>
-          </a:solidFill>
-          <a:ln w="10160">
-            <a:solidFill>
-              <a:srgbClr val="E8E8E5"/>
-            </a:solidFill>
-          </a:ln>
-        </p:spPr>
-        <p:style>
-          <a:lnRef idx="1">
-            <a:schemeClr val="accent1"/>
-          </a:lnRef>
-          <a:fillRef idx="3">
-            <a:schemeClr val="accent1"/>
-          </a:fillRef>
-          <a:effectRef idx="2">
-            <a:schemeClr val="accent1"/>
-          </a:effectRef>
-          <a:fontRef idx="minor">
-            <a:schemeClr val="lt1"/>
-          </a:fontRef>
-        </p:style>
-        <p:txBody>
-          <a:bodyPr rtlCol="0" anchor="ctr"/>
-          <a:lstStyle/>
-          <a:p>
-            <a:pPr algn="ctr"/>
-            <a:endParaRPr/>
-          </a:p>
-        </p:txBody>
-      </p:sp>
-      <p:sp>
-        <p:nvSpPr>
-          <p:cNvPr id="10" name="TextBox 9"/>
-          <p:cNvSpPr txBox="1"/>
-          <p:nvPr/>
-        </p:nvSpPr>
-        <p:spPr>
-          <a:xfrm>
-            <a:off x="6419088" y="2679192"/>
-            <a:ext cx="1371600" cy="320040"/>
-          </a:xfrm>
-          <a:prstGeom prst="rect">
-            <a:avLst/>
-          </a:prstGeom>
-          <a:noFill/>
-        </p:spPr>
-        <p:txBody>
-          <a:bodyPr wrap="none" lIns="0" tIns="0" rIns="0" bIns="0" anchor="t">
-            <a:spAutoFit/>
-          </a:bodyPr>
-          <a:lstStyle/>
-          <a:p>
-            <a:pPr algn="l"/>
-            <a:r>
-              <a:rPr sz="1500" b="1">
-                <a:solidFill>
-                  <a:srgbClr val="171717"/>
-                </a:solidFill>
-                <a:latin typeface="Aptos"/>
-              </a:rPr>
-              <a:t>Dateinamen</a:t>
-            </a:r>
-          </a:p>
-        </p:txBody>
-      </p:sp>
-      <p:sp>
-        <p:nvSpPr>
-          <p:cNvPr id="11" name="TextBox 10"/>
-          <p:cNvSpPr txBox="1"/>
-          <p:nvPr/>
-        </p:nvSpPr>
-        <p:spPr>
-          <a:xfrm>
-            <a:off x="6419088" y="3154680"/>
-            <a:ext cx="4480560" cy="1051560"/>
-          </a:xfrm>
-          <a:prstGeom prst="rect">
-            <a:avLst/>
-          </a:prstGeom>
-          <a:noFill/>
-        </p:spPr>
-        <p:txBody>
-          <a:bodyPr wrap="none" lIns="0" tIns="0" rIns="0" bIns="0" anchor="t">
-            <a:spAutoFit/>
-          </a:bodyPr>
-          <a:lstStyle/>
-          <a:p>
-            <a:pPr algn="l"/>
-            <a:r>
-              <a:rPr sz="1400" b="0">
-                <a:solidFill>
-                  <a:srgbClr val="171717"/>
-                </a:solidFill>
-                <a:latin typeface="Aptos"/>
-              </a:rPr>
-              <a:t>NUS1_W01_Uebung.pptx
-NUS1_W01_Slides.pdf
-NUS1_W01_Slides_Notes.pdf</a:t>
-            </a:r>
-          </a:p>
-        </p:txBody>
-      </p:sp>
-      <p:sp>
-        <p:nvSpPr>
-          <p:cNvPr id="12" name="TextBox 11"/>
-          <p:cNvSpPr txBox="1"/>
-          <p:nvPr/>
-        </p:nvSpPr>
-        <p:spPr>
-          <a:xfrm>
-            <a:off x="640080" y="5166360"/>
-            <a:ext cx="10515600" cy="411480"/>
-          </a:xfrm>
-          <a:prstGeom prst="rect">
-            <a:avLst/>
-          </a:prstGeom>
-          <a:noFill/>
-        </p:spPr>
-        <p:txBody>
-          <a:bodyPr wrap="none" lIns="0" tIns="0" rIns="0" bIns="0" anchor="t">
-            <a:spAutoFit/>
-          </a:bodyPr>
-          <a:lstStyle/>
-          <a:p>
-            <a:pPr algn="l"/>
-            <a:r>
-              <a:rPr sz="1500" b="1">
-                <a:solidFill>
-                  <a:srgbClr val="171717"/>
-                </a:solidFill>
-                <a:latin typeface="Aptos"/>
-              </a:rPr>
-              <a:t>Die Folien sollen vorbereiten — nicht die ganze Übung für dich sprechen.</a:t>
-            </a:r>
-          </a:p>
-        </p:txBody>
-      </p:sp>
-      <p:sp>
-        <p:nvSpPr>
-          <p:cNvPr id="16" name="Datumsplatzhalter 15">
-            <a:extLst>
-              <a:ext uri="{FF2B5EF4-FFF2-40B4-BE49-F238E27FC236}">
-                <a16:creationId xmlns:a16="http://schemas.microsoft.com/office/drawing/2014/main" id="{DF40432C-B765-AE30-8DA2-ED9DECC71A08}"/>
-              </a:ext>
-            </a:extLst>
-          </p:cNvPr>
-          <p:cNvSpPr>
-            <a:spLocks noGrp="1"/>
-          </p:cNvSpPr>
-          <p:nvPr>
-            <p:ph type="dt" sz="half" idx="10"/>
-          </p:nvPr>
-        </p:nvSpPr>
-        <p:spPr/>
-        <p:txBody>
-          <a:bodyPr/>
-          <a:lstStyle/>
-          <a:p>
-            <a:fld id="{BF35E6A0-0035-4040-A49C-78472C87DEA5}" type="datetime1">
-              <a:rPr lang="de-CH" smtClean="0"/>
-              <a:t>30.09.2026</a:t>
-            </a:fld>
-            <a:endParaRPr lang="en-US"/>
-          </a:p>
-        </p:txBody>
-      </p:sp>
-      <p:sp>
-        <p:nvSpPr>
-          <p:cNvPr id="17" name="Fußzeilenplatzhalter 16">
-            <a:extLst>
-              <a:ext uri="{FF2B5EF4-FFF2-40B4-BE49-F238E27FC236}">
-                <a16:creationId xmlns:a16="http://schemas.microsoft.com/office/drawing/2014/main" id="{89823400-78F4-A33F-85CB-655A729C3DDE}"/>
-              </a:ext>
-            </a:extLst>
-          </p:cNvPr>
-          <p:cNvSpPr>
-            <a:spLocks noGrp="1"/>
-          </p:cNvSpPr>
-          <p:nvPr>
-            <p:ph type="ftr" sz="quarter" idx="11"/>
-          </p:nvPr>
-        </p:nvSpPr>
-        <p:spPr/>
-        <p:txBody>
-          <a:bodyPr/>
-          <a:lstStyle/>
-          <a:p>
-            <a:r>
-              <a:rPr lang="en-US"/>
-              <a:t>Enrico Putzi WXX</a:t>
-            </a:r>
-          </a:p>
-        </p:txBody>
-      </p:sp>
-      <p:sp>
-        <p:nvSpPr>
-          <p:cNvPr id="18" name="Foliennummernplatzhalter 17">
-            <a:extLst>
-              <a:ext uri="{FF2B5EF4-FFF2-40B4-BE49-F238E27FC236}">
-                <a16:creationId xmlns:a16="http://schemas.microsoft.com/office/drawing/2014/main" id="{BF2FD881-A8F9-D314-61EF-85B3AFB9E1B7}"/>
-              </a:ext>
-            </a:extLst>
-          </p:cNvPr>
-          <p:cNvSpPr>
-            <a:spLocks noGrp="1"/>
-          </p:cNvSpPr>
-          <p:nvPr>
-            <p:ph type="sldNum" sz="quarter" idx="12"/>
-          </p:nvPr>
-        </p:nvSpPr>
-        <p:spPr/>
-        <p:txBody>
-          <a:bodyPr/>
-          <a:lstStyle/>
-          <a:p>
-            <a:fld id="{C1FF6DA9-008F-8B48-92A6-B652298478BF}" type="slidenum">
-              <a:rPr lang="en-US" smtClean="0"/>
-              <a:t>8</a:t>
             </a:fld>
             <a:endParaRPr lang="en-US"/>
           </a:p>

--- a/courses/nus1/files/slides/template.pptx
+++ b/courses/nus1/files/slides/template.pptx
@@ -926,7 +926,7 @@
           <a:p>
             <a:fld id="{1841982D-82A2-4E03-A07D-65CA8B5F8742}" type="datetime1">
               <a:rPr lang="de-CH" smtClean="0"/>
-              <a:t>14.10.2026</a:t>
+              <a:t>28.10.2026</a:t>
             </a:fld>
             <a:endParaRPr lang="en-US"/>
           </a:p>
@@ -1097,7 +1097,7 @@
           <a:p>
             <a:fld id="{E537C623-2BE6-40DF-A481-1E3E5DAF3BB1}" type="datetime1">
               <a:rPr lang="de-CH" smtClean="0"/>
-              <a:t>14.10.2026</a:t>
+              <a:t>28.10.2026</a:t>
             </a:fld>
             <a:endParaRPr lang="en-US"/>
           </a:p>
@@ -1278,7 +1278,7 @@
           <a:p>
             <a:fld id="{2387D4E0-9B7E-4417-AEAD-59A9C21D2514}" type="datetime1">
               <a:rPr lang="de-CH" smtClean="0"/>
-              <a:t>14.10.2026</a:t>
+              <a:t>28.10.2026</a:t>
             </a:fld>
             <a:endParaRPr lang="en-US"/>
           </a:p>
@@ -1449,7 +1449,7 @@
           <a:p>
             <a:fld id="{CA814FE1-0FA3-48D7-8958-994BF4919AE6}" type="datetime1">
               <a:rPr lang="de-CH" smtClean="0"/>
-              <a:t>14.10.2026</a:t>
+              <a:t>28.10.2026</a:t>
             </a:fld>
             <a:endParaRPr lang="en-US"/>
           </a:p>
@@ -1697,7 +1697,7 @@
           <a:p>
             <a:fld id="{C893AEC3-33C5-4096-928C-E105753C3DA5}" type="datetime1">
               <a:rPr lang="de-CH" smtClean="0"/>
-              <a:t>14.10.2026</a:t>
+              <a:t>28.10.2026</a:t>
             </a:fld>
             <a:endParaRPr lang="en-US"/>
           </a:p>
@@ -1985,7 +1985,7 @@
           <a:p>
             <a:fld id="{6067A475-4367-4D6E-AD87-3B1FF46691DF}" type="datetime1">
               <a:rPr lang="de-CH" smtClean="0"/>
-              <a:t>14.10.2026</a:t>
+              <a:t>28.10.2026</a:t>
             </a:fld>
             <a:endParaRPr lang="en-US"/>
           </a:p>
@@ -2407,7 +2407,7 @@
           <a:p>
             <a:fld id="{B5B81D07-040C-403D-A621-294731A1A73C}" type="datetime1">
               <a:rPr lang="de-CH" smtClean="0"/>
-              <a:t>14.10.2026</a:t>
+              <a:t>28.10.2026</a:t>
             </a:fld>
             <a:endParaRPr lang="en-US"/>
           </a:p>
@@ -2527,7 +2527,7 @@
           <a:p>
             <a:fld id="{7A084239-FBF7-458E-B3A9-617203C3EFDE}" type="datetime1">
               <a:rPr lang="de-CH" smtClean="0"/>
-              <a:t>14.10.2026</a:t>
+              <a:t>28.10.2026</a:t>
             </a:fld>
             <a:endParaRPr lang="en-US"/>
           </a:p>
@@ -2625,7 +2625,7 @@
           <a:p>
             <a:fld id="{EA470B40-5609-4D0C-9667-2862A3AF6E35}" type="datetime1">
               <a:rPr lang="de-CH" smtClean="0"/>
-              <a:t>14.10.2026</a:t>
+              <a:t>28.10.2026</a:t>
             </a:fld>
             <a:endParaRPr lang="en-US"/>
           </a:p>
@@ -2903,7 +2903,7 @@
           <a:p>
             <a:fld id="{6432A5C9-989E-4915-90A3-748149489DA8}" type="datetime1">
               <a:rPr lang="de-CH" smtClean="0"/>
-              <a:t>14.10.2026</a:t>
+              <a:t>28.10.2026</a:t>
             </a:fld>
             <a:endParaRPr lang="en-US"/>
           </a:p>
@@ -3158,7 +3158,7 @@
           <a:p>
             <a:fld id="{DE5FC3CA-46A9-4BDD-9F7F-F76319CF56C8}" type="datetime1">
               <a:rPr lang="de-CH" smtClean="0"/>
-              <a:t>14.10.2026</a:t>
+              <a:t>28.10.2026</a:t>
             </a:fld>
             <a:endParaRPr lang="en-US"/>
           </a:p>
@@ -3372,7 +3372,7 @@
           <a:p>
             <a:fld id="{1DF76107-2327-4742-820B-1886FFEE5E55}" type="datetime1">
               <a:rPr lang="de-CH" smtClean="0"/>
-              <a:t>14.10.2026</a:t>
+              <a:t>28.10.2026</a:t>
             </a:fld>
             <a:endParaRPr lang="en-US"/>
           </a:p>
@@ -4585,7 +4585,7 @@
           <a:p>
             <a:fld id="{77A2E3E8-6F8A-4A2D-87B8-002A9DB830F0}" type="datetime1">
               <a:rPr lang="de-CH" smtClean="0"/>
-              <a:t>14.10.2026</a:t>
+              <a:t>28.10.2026</a:t>
             </a:fld>
             <a:endParaRPr lang="en-US"/>
           </a:p>
@@ -4890,7 +4890,7 @@
           <a:p>
             <a:fld id="{497E40BA-CE70-4E4C-B484-B26569D677F9}" type="datetime1">
               <a:rPr lang="de-CH" smtClean="0"/>
-              <a:t>14.10.2026</a:t>
+              <a:t>28.10.2026</a:t>
             </a:fld>
             <a:endParaRPr lang="en-US"/>
           </a:p>
@@ -5266,7 +5266,7 @@
           <a:p>
             <a:fld id="{182A7AC6-7431-48B9-BAC6-F1C873F640C5}" type="datetime1">
               <a:rPr lang="de-CH" smtClean="0"/>
-              <a:t>14.10.2026</a:t>
+              <a:t>28.10.2026</a:t>
             </a:fld>
             <a:endParaRPr lang="en-US" dirty="0"/>
           </a:p>
@@ -5773,7 +5773,7 @@
           <a:p>
             <a:fld id="{9FF66390-A5DB-4C85-BAE8-E7F62705DCE4}" type="datetime1">
               <a:rPr lang="de-CH" smtClean="0"/>
-              <a:t>14.10.2026</a:t>
+              <a:t>28.10.2026</a:t>
             </a:fld>
             <a:endParaRPr lang="en-US"/>
           </a:p>
@@ -6078,7 +6078,7 @@
           <a:p>
             <a:fld id="{B1779357-3FFB-49C6-A63A-1C2EF11BA49D}" type="datetime1">
               <a:rPr lang="de-CH" smtClean="0"/>
-              <a:t>14.10.2026</a:t>
+              <a:t>28.10.2026</a:t>
             </a:fld>
             <a:endParaRPr lang="en-US"/>
           </a:p>
@@ -6710,41 +6710,6 @@
       </p:sp>
       <p:sp>
         <p:nvSpPr>
-          <p:cNvPr id="20" name="TextBox 19"/>
-          <p:cNvSpPr txBox="1"/>
-          <p:nvPr/>
-        </p:nvSpPr>
-        <p:spPr>
-          <a:xfrm>
-            <a:off x="640080" y="5532120"/>
-            <a:ext cx="4572000" cy="274320"/>
-          </a:xfrm>
-          <a:prstGeom prst="rect">
-            <a:avLst/>
-          </a:prstGeom>
-          <a:noFill/>
-        </p:spPr>
-        <p:txBody>
-          <a:bodyPr wrap="none" lIns="0" tIns="0" rIns="0" bIns="0" anchor="t">
-            <a:spAutoFit/>
-          </a:bodyPr>
-          <a:lstStyle/>
-          <a:p>
-            <a:pPr algn="l"/>
-            <a:r>
-              <a:rPr sz="1050" b="0">
-                <a:solidFill>
-                  <a:srgbClr val="737373"/>
-                </a:solidFill>
-                <a:latin typeface="Aptos"/>
-              </a:rPr>
-              <a:t>[QR / Link zum Fragen-Tool]</a:t>
-            </a:r>
-          </a:p>
-        </p:txBody>
-      </p:sp>
-      <p:sp>
-        <p:nvSpPr>
           <p:cNvPr id="24" name="Datumsplatzhalter 23">
             <a:extLst>
               <a:ext uri="{FF2B5EF4-FFF2-40B4-BE49-F238E27FC236}">
@@ -6766,7 +6731,7 @@
           <a:p>
             <a:fld id="{EB8E9A6E-507F-46C1-9F12-1A6D72FBF908}" type="datetime1">
               <a:rPr lang="de-CH" smtClean="0"/>
-              <a:t>14.10.2026</a:t>
+              <a:t>28.10.2026</a:t>
             </a:fld>
             <a:endParaRPr lang="en-US" dirty="0"/>
           </a:p>
